--- a/templates/proposal/pptx/project-proposal.pptx
+++ b/templates/proposal/pptx/project-proposal.pptx
@@ -1407,8 +1407,8 @@
         </p:nvSpPr>
         <p:spPr>
           <a:xfrm>
-            <a:off x="0" y="6217920"/>
-            <a:ext cx="12192000" cy="73152"/>
+            <a:off x="0" y="6565392"/>
+            <a:ext cx="12192000" cy="54864"/>
           </a:xfrm>
           <a:prstGeom prst="rect">
             <a:avLst/>
@@ -1427,8 +1427,8 @@
         </p:nvSpPr>
         <p:spPr>
           <a:xfrm>
-            <a:off x="274320" y="6291072"/>
-            <a:ext cx="1828800" cy="182880"/>
+            <a:off x="274320" y="6620256"/>
+            <a:ext cx="1828800" cy="201168"/>
           </a:xfrm>
           <a:prstGeom prst="rect">
             <a:avLst/>
@@ -1444,14 +1444,56 @@
               <a:buNone/>
             </a:pPr>
             <a:r>
-              <a:rPr lang="en-US" sz="900" dirty="0">
+              <a:rPr lang="en-US" sz="800" dirty="0">
                 <a:solidFill>
                   <a:srgbClr val="8892B0"/>
                 </a:solidFill>
+                <a:latin typeface="Calibri" pitchFamily="34" charset="0"/>
+                <a:ea typeface="Calibri" pitchFamily="34" charset="-122"/>
+                <a:cs typeface="Calibri" pitchFamily="34" charset="-120"/>
               </a:rPr>
               <a:t>ViePilot</a:t>
             </a:r>
-            <a:endParaRPr lang="en-US" sz="900" dirty="0"/>
+            <a:endParaRPr lang="en-US" sz="800" dirty="0"/>
+          </a:p>
+        </p:txBody>
+      </p:sp>
+      <p:sp>
+        <p:nvSpPr>
+          <p:cNvPr id="4" name="Text 2"/>
+          <p:cNvSpPr/>
+          <p:nvPr/>
+        </p:nvSpPr>
+        <p:spPr>
+          <a:xfrm>
+            <a:off x="10515600" y="6620256"/>
+            <a:ext cx="1371600" cy="201168"/>
+          </a:xfrm>
+          <a:prstGeom prst="rect">
+            <a:avLst/>
+          </a:prstGeom>
+          <a:noFill/>
+          <a:ln/>
+        </p:spPr>
+        <p:txBody>
+          <a:bodyPr wrap="square" rtlCol="0" anchor="ctr"/>
+          <a:lstStyle/>
+          <a:p>
+            <a:pPr algn="r" indent="0" marL="0">
+              <a:buNone/>
+            </a:pPr>
+            <a:r>
+              <a:rPr lang="en-US" sz="800" dirty="0">
+                <a:solidFill>
+                  <a:srgbClr val="5A637A"/>
+                </a:solidFill>
+                <a:latin typeface="Calibri" pitchFamily="34" charset="0"/>
+                <a:ea typeface="Calibri" pitchFamily="34" charset="-122"/>
+                <a:cs typeface="Calibri" pitchFamily="34" charset="-120"/>
+              </a:rPr>
+              <a:t>·</a:t>
+            </a:r>
+            <a:endParaRPr lang="en-US" sz="800" dirty="0"/>
           </a:p>
         </p:txBody>
       </p:sp>
@@ -1766,8 +1808,28 @@
         </p:nvSpPr>
         <p:spPr>
           <a:xfrm>
-            <a:off x="0" y="1645920"/>
-            <a:ext cx="109728" cy="2194560"/>
+            <a:off x="0" y="0"/>
+            <a:ext cx="4754880" cy="6858000"/>
+          </a:xfrm>
+          <a:prstGeom prst="rect">
+            <a:avLst/>
+          </a:prstGeom>
+          <a:solidFill>
+            <a:srgbClr val="2D3142"/>
+          </a:solidFill>
+          <a:ln/>
+        </p:spPr>
+      </p:sp>
+      <p:sp>
+        <p:nvSpPr>
+          <p:cNvPr id="3" name="Shape 1"/>
+          <p:cNvSpPr/>
+          <p:nvPr/>
+        </p:nvSpPr>
+        <p:spPr>
+          <a:xfrm>
+            <a:off x="0" y="0"/>
+            <a:ext cx="182880" cy="6858000"/>
           </a:xfrm>
           <a:prstGeom prst="rect">
             <a:avLst/>
@@ -1780,14 +1842,34 @@
       </p:sp>
       <p:sp>
         <p:nvSpPr>
-          <p:cNvPr id="3" name="Text 1"/>
-          <p:cNvSpPr/>
-          <p:nvPr/>
-        </p:nvSpPr>
-        <p:spPr>
-          <a:xfrm>
-            <a:off x="365760" y="1737360"/>
-            <a:ext cx="10607040" cy="1097280"/>
+          <p:cNvPr id="4" name="Shape 2"/>
+          <p:cNvSpPr/>
+          <p:nvPr/>
+        </p:nvSpPr>
+        <p:spPr>
+          <a:xfrm>
+            <a:off x="4937760" y="2560320"/>
+            <a:ext cx="7040880" cy="45720"/>
+          </a:xfrm>
+          <a:prstGeom prst="rect">
+            <a:avLst/>
+          </a:prstGeom>
+          <a:solidFill>
+            <a:srgbClr val="4F6EF7"/>
+          </a:solidFill>
+          <a:ln/>
+        </p:spPr>
+      </p:sp>
+      <p:sp>
+        <p:nvSpPr>
+          <p:cNvPr id="5" name="Text 3"/>
+          <p:cNvSpPr/>
+          <p:nvPr/>
+        </p:nvSpPr>
+        <p:spPr>
+          <a:xfrm>
+            <a:off x="5120640" y="457200"/>
+            <a:ext cx="6766560" cy="365760"/>
           </a:xfrm>
           <a:prstGeom prst="rect">
             <a:avLst/>
@@ -1803,30 +1885,30 @@
               <a:buNone/>
             </a:pPr>
             <a:r>
-              <a:rPr lang="en-US" sz="4000" b="1" dirty="0">
-                <a:solidFill>
-                  <a:srgbClr val="E8ECF4"/>
-                </a:solidFill>
-                <a:latin typeface="Calibri" pitchFamily="34" charset="0"/>
-                <a:ea typeface="Calibri" pitchFamily="34" charset="-122"/>
-                <a:cs typeface="Calibri" pitchFamily="34" charset="-120"/>
-              </a:rPr>
-              <a:t>{{Project Name}}</a:t>
-            </a:r>
-            <a:endParaRPr lang="en-US" sz="4000" dirty="0"/>
-          </a:p>
-        </p:txBody>
-      </p:sp>
-      <p:sp>
-        <p:nvSpPr>
-          <p:cNvPr id="4" name="Text 2"/>
-          <p:cNvSpPr/>
-          <p:nvPr/>
-        </p:nvSpPr>
-        <p:spPr>
-          <a:xfrm>
-            <a:off x="365760" y="2926080"/>
-            <a:ext cx="8229600" cy="640080"/>
+              <a:rPr lang="en-US" sz="1100" b="1" spc="300" kern="0" dirty="0">
+                <a:solidFill>
+                  <a:srgbClr val="4F6EF7"/>
+                </a:solidFill>
+                <a:latin typeface="Calibri" pitchFamily="34" charset="0"/>
+                <a:ea typeface="Calibri" pitchFamily="34" charset="-122"/>
+                <a:cs typeface="Calibri" pitchFamily="34" charset="-120"/>
+              </a:rPr>
+              <a:t>PROPOSAL</a:t>
+            </a:r>
+            <a:endParaRPr lang="en-US" sz="1100" dirty="0"/>
+          </a:p>
+        </p:txBody>
+      </p:sp>
+      <p:sp>
+        <p:nvSpPr>
+          <p:cNvPr id="6" name="Text 4"/>
+          <p:cNvSpPr/>
+          <p:nvPr/>
+        </p:nvSpPr>
+        <p:spPr>
+          <a:xfrm>
+            <a:off x="4937760" y="1005840"/>
+            <a:ext cx="7040880" cy="1645920"/>
           </a:xfrm>
           <a:prstGeom prst="rect">
             <a:avLst/>
@@ -1842,30 +1924,30 @@
               <a:buNone/>
             </a:pPr>
             <a:r>
-              <a:rPr lang="en-US" sz="2000" dirty="0">
-                <a:solidFill>
-                  <a:srgbClr val="8892B0"/>
-                </a:solidFill>
-                <a:latin typeface="Calibri" pitchFamily="34" charset="0"/>
-                <a:ea typeface="Calibri" pitchFamily="34" charset="-122"/>
-                <a:cs typeface="Calibri" pitchFamily="34" charset="-120"/>
-              </a:rPr>
-              <a:t>Project Proposal · {{Client}} · {{Date}}</a:t>
-            </a:r>
-            <a:endParaRPr lang="en-US" sz="2000" dirty="0"/>
-          </a:p>
-        </p:txBody>
-      </p:sp>
-      <p:sp>
-        <p:nvSpPr>
-          <p:cNvPr id="5" name="Text 3"/>
-          <p:cNvSpPr/>
-          <p:nvPr/>
-        </p:nvSpPr>
-        <p:spPr>
-          <a:xfrm>
-            <a:off x="365760" y="3840480"/>
-            <a:ext cx="5486400" cy="320040"/>
+              <a:rPr lang="en-US" sz="3400" b="1" dirty="0">
+                <a:solidFill>
+                  <a:srgbClr val="E8ECF4"/>
+                </a:solidFill>
+                <a:latin typeface="Calibri" pitchFamily="34" charset="0"/>
+                <a:ea typeface="Calibri" pitchFamily="34" charset="-122"/>
+                <a:cs typeface="Calibri" pitchFamily="34" charset="-120"/>
+              </a:rPr>
+              <a:t>{{Project Name}}</a:t>
+            </a:r>
+            <a:endParaRPr lang="en-US" sz="3400" dirty="0"/>
+          </a:p>
+        </p:txBody>
+      </p:sp>
+      <p:sp>
+        <p:nvSpPr>
+          <p:cNvPr id="7" name="Text 5"/>
+          <p:cNvSpPr/>
+          <p:nvPr/>
+        </p:nvSpPr>
+        <p:spPr>
+          <a:xfrm>
+            <a:off x="4937760" y="2743200"/>
+            <a:ext cx="7040880" cy="822960"/>
           </a:xfrm>
           <a:prstGeom prst="rect">
             <a:avLst/>
@@ -1881,12 +1963,132 @@
               <a:buNone/>
             </a:pPr>
             <a:r>
+              <a:rPr lang="en-US" sz="1700" dirty="0">
+                <a:solidFill>
+                  <a:srgbClr val="8892B0"/>
+                </a:solidFill>
+                <a:latin typeface="Calibri" pitchFamily="34" charset="0"/>
+                <a:ea typeface="Calibri" pitchFamily="34" charset="-122"/>
+                <a:cs typeface="Calibri" pitchFamily="34" charset="-120"/>
+              </a:rPr>
+              <a:t>{{One sentence describing the value this project delivers to the client}}</a:t>
+            </a:r>
+            <a:endParaRPr lang="en-US" sz="1700" dirty="0"/>
+          </a:p>
+        </p:txBody>
+      </p:sp>
+      <p:sp>
+        <p:nvSpPr>
+          <p:cNvPr id="8" name="Text 6"/>
+          <p:cNvSpPr/>
+          <p:nvPr/>
+        </p:nvSpPr>
+        <p:spPr>
+          <a:xfrm>
+            <a:off x="4937760" y="3749040"/>
+            <a:ext cx="7040880" cy="457200"/>
+          </a:xfrm>
+          <a:prstGeom prst="rect">
+            <a:avLst/>
+          </a:prstGeom>
+          <a:noFill/>
+          <a:ln/>
+        </p:spPr>
+        <p:txBody>
+          <a:bodyPr wrap="square" rtlCol="0" anchor="ctr"/>
+          <a:lstStyle/>
+          <a:p>
+            <a:pPr indent="0" marL="0">
+              <a:buNone/>
+            </a:pPr>
+            <a:r>
+              <a:rPr lang="en-US" sz="1200" dirty="0">
+                <a:solidFill>
+                  <a:srgbClr val="5A637A"/>
+                </a:solidFill>
+                <a:latin typeface="Calibri" pitchFamily="34" charset="0"/>
+                <a:ea typeface="Calibri" pitchFamily="34" charset="-122"/>
+                <a:cs typeface="Calibri" pitchFamily="34" charset="-120"/>
+              </a:rPr>
+              <a:t>Prepared for {{Client}} · {{Date}}</a:t>
+            </a:r>
+            <a:endParaRPr lang="en-US" sz="1200" dirty="0"/>
+          </a:p>
+        </p:txBody>
+      </p:sp>
+      <p:sp>
+        <p:nvSpPr>
+          <p:cNvPr id="9" name="Text 7"/>
+          <p:cNvSpPr/>
+          <p:nvPr/>
+        </p:nvSpPr>
+        <p:spPr>
+          <a:xfrm>
+            <a:off x="365760" y="457200"/>
+            <a:ext cx="1097280" cy="1097280"/>
+          </a:xfrm>
+          <a:prstGeom prst="rect">
+            <a:avLst/>
+          </a:prstGeom>
+          <a:noFill/>
+          <a:ln/>
+        </p:spPr>
+        <p:txBody>
+          <a:bodyPr wrap="square" rtlCol="0" anchor="ctr"/>
+          <a:lstStyle/>
+          <a:p>
+            <a:pPr indent="0" marL="0">
+              <a:buNone/>
+            </a:pPr>
+            <a:r>
+              <a:rPr lang="en-US" sz="5600" b="1" dirty="0">
+                <a:solidFill>
+                  <a:srgbClr val="4F6EF7"/>
+                </a:solidFill>
+                <a:latin typeface="Calibri" pitchFamily="34" charset="0"/>
+                <a:ea typeface="Calibri" pitchFamily="34" charset="-122"/>
+                <a:cs typeface="Calibri" pitchFamily="34" charset="-120"/>
+              </a:rPr>
+              <a:t>V</a:t>
+            </a:r>
+            <a:endParaRPr lang="en-US" sz="5600" dirty="0"/>
+          </a:p>
+        </p:txBody>
+      </p:sp>
+      <p:sp>
+        <p:nvSpPr>
+          <p:cNvPr id="10" name="Text 8"/>
+          <p:cNvSpPr/>
+          <p:nvPr/>
+        </p:nvSpPr>
+        <p:spPr>
+          <a:xfrm>
+            <a:off x="365760" y="5943600"/>
+            <a:ext cx="4023360" cy="365760"/>
+          </a:xfrm>
+          <a:prstGeom prst="rect">
+            <a:avLst/>
+          </a:prstGeom>
+          <a:noFill/>
+          <a:ln/>
+        </p:spPr>
+        <p:txBody>
+          <a:bodyPr wrap="square" rtlCol="0" anchor="ctr"/>
+          <a:lstStyle/>
+          <a:p>
+            <a:pPr indent="0" marL="0">
+              <a:buNone/>
+            </a:pPr>
+            <a:r>
               <a:rPr lang="en-US" sz="1100" dirty="0">
                 <a:solidFill>
                   <a:srgbClr val="8892B0"/>
                 </a:solidFill>
-              </a:rPr>
-              <a:t>Prepared with ViePilot · 2026</a:t>
+                <a:latin typeface="Calibri" pitchFamily="34" charset="0"/>
+                <a:ea typeface="Calibri" pitchFamily="34" charset="-122"/>
+                <a:cs typeface="Calibri" pitchFamily="34" charset="-120"/>
+              </a:rPr>
+              <a:t>ViePilot</a:t>
             </a:r>
             <a:endParaRPr lang="en-US" sz="1100" dirty="0"/>
           </a:p>
@@ -1946,7 +2148,7 @@
         <p:spPr>
           <a:xfrm>
             <a:off x="0" y="0"/>
-            <a:ext cx="12192000" cy="73152"/>
+            <a:ext cx="12192000" cy="137160"/>
           </a:xfrm>
           <a:prstGeom prst="rect">
             <a:avLst/>
@@ -1959,14 +2161,34 @@
       </p:sp>
       <p:sp>
         <p:nvSpPr>
-          <p:cNvPr id="4" name="Text 2"/>
-          <p:cNvSpPr/>
-          <p:nvPr/>
-        </p:nvSpPr>
-        <p:spPr>
-          <a:xfrm>
-            <a:off x="457200" y="1371600"/>
-            <a:ext cx="10424160" cy="1280160"/>
+          <p:cNvPr id="4" name="Shape 2"/>
+          <p:cNvSpPr/>
+          <p:nvPr/>
+        </p:nvSpPr>
+        <p:spPr>
+          <a:xfrm>
+            <a:off x="0" y="6720840"/>
+            <a:ext cx="12192000" cy="137160"/>
+          </a:xfrm>
+          <a:prstGeom prst="rect">
+            <a:avLst/>
+          </a:prstGeom>
+          <a:solidFill>
+            <a:srgbClr val="4F6EF7"/>
+          </a:solidFill>
+          <a:ln/>
+        </p:spPr>
+      </p:sp>
+      <p:sp>
+        <p:nvSpPr>
+          <p:cNvPr id="5" name="Text 3"/>
+          <p:cNvSpPr/>
+          <p:nvPr/>
+        </p:nvSpPr>
+        <p:spPr>
+          <a:xfrm>
+            <a:off x="457200" y="1280160"/>
+            <a:ext cx="11338560" cy="457200"/>
           </a:xfrm>
           <a:prstGeom prst="rect">
             <a:avLst/>
@@ -1982,27 +2204,30 @@
               <a:buNone/>
             </a:pPr>
             <a:r>
-              <a:rPr lang="en-US" sz="4800" b="1" dirty="0">
-                <a:solidFill>
-                  <a:srgbClr val="FFFFFF"/>
-                </a:solidFill>
-              </a:rPr>
-              <a:t>Thank You</a:t>
-            </a:r>
-            <a:endParaRPr lang="en-US" sz="4800" dirty="0"/>
-          </a:p>
-        </p:txBody>
-      </p:sp>
-      <p:sp>
-        <p:nvSpPr>
-          <p:cNvPr id="5" name="Text 3"/>
-          <p:cNvSpPr/>
-          <p:nvPr/>
-        </p:nvSpPr>
-        <p:spPr>
-          <a:xfrm>
-            <a:off x="457200" y="2926080"/>
-            <a:ext cx="10424160" cy="731520"/>
+              <a:rPr lang="en-US" sz="1300" b="1" spc="200" kern="0" dirty="0">
+                <a:solidFill>
+                  <a:srgbClr val="4F6EF7"/>
+                </a:solidFill>
+                <a:latin typeface="Calibri" pitchFamily="34" charset="0"/>
+                <a:ea typeface="Calibri" pitchFamily="34" charset="-122"/>
+                <a:cs typeface="Calibri" pitchFamily="34" charset="-120"/>
+              </a:rPr>
+              <a:t>What's Next</a:t>
+            </a:r>
+            <a:endParaRPr lang="en-US" sz="1300" dirty="0"/>
+          </a:p>
+        </p:txBody>
+      </p:sp>
+      <p:sp>
+        <p:nvSpPr>
+          <p:cNvPr id="6" name="Text 4"/>
+          <p:cNvSpPr/>
+          <p:nvPr/>
+        </p:nvSpPr>
+        <p:spPr>
+          <a:xfrm>
+            <a:off x="914400" y="1920240"/>
+            <a:ext cx="10424160" cy="1828800"/>
           </a:xfrm>
           <a:prstGeom prst="rect">
             <a:avLst/>
@@ -2018,27 +2243,50 @@
               <a:buNone/>
             </a:pPr>
             <a:r>
-              <a:rPr lang="en-US" sz="2000" dirty="0">
-                <a:solidFill>
-                  <a:srgbClr val="8892B0"/>
-                </a:solidFill>
-              </a:rPr>
-              <a:t>Ready to get started? Let's discuss next steps.</a:t>
-            </a:r>
-            <a:endParaRPr lang="en-US" sz="2000" dirty="0"/>
-          </a:p>
-        </p:txBody>
-      </p:sp>
-      <p:sp>
-        <p:nvSpPr>
-          <p:cNvPr id="6" name="Text 4"/>
-          <p:cNvSpPr/>
-          <p:nvPr/>
-        </p:nvSpPr>
-        <p:spPr>
-          <a:xfrm>
-            <a:off x="457200" y="3931920"/>
-            <a:ext cx="10424160" cy="365760"/>
+              <a:rPr lang="en-US" sz="3200" b="1" dirty="0">
+                <a:solidFill>
+                  <a:srgbClr val="FFFFFF"/>
+                </a:solidFill>
+                <a:latin typeface="Calibri" pitchFamily="34" charset="0"/>
+                <a:ea typeface="Calibri" pitchFamily="34" charset="-122"/>
+                <a:cs typeface="Calibri" pitchFamily="34" charset="-120"/>
+              </a:rPr>
+              <a:t>{{Ready to start? Let's schedule the kickoff.}}</a:t>
+            </a:r>
+            <a:endParaRPr lang="en-US" sz="3200" dirty="0"/>
+          </a:p>
+        </p:txBody>
+      </p:sp>
+      <p:sp>
+        <p:nvSpPr>
+          <p:cNvPr id="7" name="Shape 5"/>
+          <p:cNvSpPr/>
+          <p:nvPr/>
+        </p:nvSpPr>
+        <p:spPr>
+          <a:xfrm>
+            <a:off x="4114800" y="3931920"/>
+            <a:ext cx="4023360" cy="36576"/>
+          </a:xfrm>
+          <a:prstGeom prst="rect">
+            <a:avLst/>
+          </a:prstGeom>
+          <a:solidFill>
+            <a:srgbClr val="4F6EF7"/>
+          </a:solidFill>
+          <a:ln/>
+        </p:spPr>
+      </p:sp>
+      <p:sp>
+        <p:nvSpPr>
+          <p:cNvPr id="8" name="Text 6"/>
+          <p:cNvSpPr/>
+          <p:nvPr/>
+        </p:nvSpPr>
+        <p:spPr>
+          <a:xfrm>
+            <a:off x="457200" y="4160520"/>
+            <a:ext cx="11338560" cy="411480"/>
           </a:xfrm>
           <a:prstGeom prst="rect">
             <a:avLst/>
@@ -2058,10 +2306,52 @@
                 <a:solidFill>
                   <a:srgbClr val="8892B0"/>
                 </a:solidFill>
-              </a:rPr>
-              <a:t>contact@example.com · viepilot.dev</a:t>
+                <a:latin typeface="Calibri" pitchFamily="34" charset="0"/>
+                <a:ea typeface="Calibri" pitchFamily="34" charset="-122"/>
+                <a:cs typeface="Calibri" pitchFamily="34" charset="-120"/>
+              </a:rPr>
+              <a:t>contact@example.com  ·  Schedule a call: calendly.com/{{handle}}</a:t>
             </a:r>
             <a:endParaRPr lang="en-US" sz="1300" dirty="0"/>
+          </a:p>
+        </p:txBody>
+      </p:sp>
+      <p:sp>
+        <p:nvSpPr>
+          <p:cNvPr id="9" name="Text 7"/>
+          <p:cNvSpPr/>
+          <p:nvPr/>
+        </p:nvSpPr>
+        <p:spPr>
+          <a:xfrm>
+            <a:off x="457200" y="6035040"/>
+            <a:ext cx="11338560" cy="320040"/>
+          </a:xfrm>
+          <a:prstGeom prst="rect">
+            <a:avLst/>
+          </a:prstGeom>
+          <a:noFill/>
+          <a:ln/>
+        </p:spPr>
+        <p:txBody>
+          <a:bodyPr wrap="square" rtlCol="0" anchor="ctr"/>
+          <a:lstStyle/>
+          <a:p>
+            <a:pPr algn="ctr" indent="0" marL="0">
+              <a:buNone/>
+            </a:pPr>
+            <a:r>
+              <a:rPr lang="en-US" sz="1000" dirty="0">
+                <a:solidFill>
+                  <a:srgbClr val="5A637A"/>
+                </a:solidFill>
+                <a:latin typeface="Calibri" pitchFamily="34" charset="0"/>
+                <a:ea typeface="Calibri" pitchFamily="34" charset="-122"/>
+                <a:cs typeface="Calibri" pitchFamily="34" charset="-120"/>
+              </a:rPr>
+              <a:t>Powered by ViePilot</a:t>
+            </a:r>
+            <a:endParaRPr lang="en-US" sz="1000" dirty="0"/>
           </a:p>
         </p:txBody>
       </p:sp>
@@ -2099,7 +2389,27 @@
         <p:spPr>
           <a:xfrm>
             <a:off x="0" y="0"/>
-            <a:ext cx="12192000" cy="1005840"/>
+            <a:ext cx="109728" cy="6858000"/>
+          </a:xfrm>
+          <a:prstGeom prst="rect">
+            <a:avLst/>
+          </a:prstGeom>
+          <a:solidFill>
+            <a:srgbClr val="4F6EF7"/>
+          </a:solidFill>
+          <a:ln/>
+        </p:spPr>
+      </p:sp>
+      <p:sp>
+        <p:nvSpPr>
+          <p:cNvPr id="3" name="Shape 1"/>
+          <p:cNvSpPr/>
+          <p:nvPr/>
+        </p:nvSpPr>
+        <p:spPr>
+          <a:xfrm>
+            <a:off x="109728" y="0"/>
+            <a:ext cx="12079224" cy="914400"/>
           </a:xfrm>
           <a:prstGeom prst="rect">
             <a:avLst/>
@@ -2112,14 +2422,14 @@
       </p:sp>
       <p:sp>
         <p:nvSpPr>
-          <p:cNvPr id="3" name="Text 1"/>
-          <p:cNvSpPr/>
-          <p:nvPr/>
-        </p:nvSpPr>
-        <p:spPr>
-          <a:xfrm>
-            <a:off x="365760" y="164592"/>
-            <a:ext cx="10607040" cy="685800"/>
+          <p:cNvPr id="4" name="Text 2"/>
+          <p:cNvSpPr/>
+          <p:nvPr/>
+        </p:nvSpPr>
+        <p:spPr>
+          <a:xfrm>
+            <a:off x="347472" y="109728"/>
+            <a:ext cx="11612880" cy="694944"/>
           </a:xfrm>
           <a:prstGeom prst="rect">
             <a:avLst/>
@@ -2135,7 +2445,7 @@
               <a:buNone/>
             </a:pPr>
             <a:r>
-              <a:rPr lang="en-US" sz="2400" b="1" dirty="0">
+              <a:rPr lang="en-US" sz="2200" b="1" dirty="0">
                 <a:solidFill>
                   <a:srgbClr val="E8ECF4"/>
                 </a:solidFill>
@@ -2145,20 +2455,20 @@
               </a:rPr>
               <a:t>Agenda</a:t>
             </a:r>
-            <a:endParaRPr lang="en-US" sz="2400" dirty="0"/>
-          </a:p>
-        </p:txBody>
-      </p:sp>
-      <p:sp>
-        <p:nvSpPr>
-          <p:cNvPr id="4" name="Text 2"/>
-          <p:cNvSpPr/>
-          <p:nvPr/>
-        </p:nvSpPr>
-        <p:spPr>
-          <a:xfrm>
-            <a:off x="457200" y="1188720"/>
-            <a:ext cx="10424160" cy="4754880"/>
+            <a:endParaRPr lang="en-US" sz="2200" dirty="0"/>
+          </a:p>
+        </p:txBody>
+      </p:sp>
+      <p:sp>
+        <p:nvSpPr>
+          <p:cNvPr id="5" name="Text 3"/>
+          <p:cNvSpPr/>
+          <p:nvPr/>
+        </p:nvSpPr>
+        <p:spPr>
+          <a:xfrm>
+            <a:off x="457200" y="1097280"/>
+            <a:ext cx="11430000" cy="5212080"/>
           </a:xfrm>
           <a:prstGeom prst="rect">
             <a:avLst/>
@@ -2170,12 +2480,13 @@
           <a:bodyPr wrap="square" rtlCol="0" anchor="t"/>
           <a:lstStyle/>
           <a:p>
-            <a:pPr marL="342900" indent="-342900">
-              <a:buSzPct val="100000"/>
-              <a:buChar char="•"/>
-            </a:pPr>
-            <a:r>
-              <a:rPr lang="en-US" sz="1600" dirty="0">
+            <a:pPr>
+              <a:spcAft>
+                <a:spcPts val="800"/>
+              </a:spcAft>
+            </a:pPr>
+            <a:r>
+              <a:rPr lang="en-US" sz="1500" dirty="0">
                 <a:solidFill>
                   <a:srgbClr val="E8ECF4"/>
                 </a:solidFill>
@@ -2185,15 +2496,16 @@
               </a:rPr>
               <a:t>Problem &amp; Opportunity</a:t>
             </a:r>
-            <a:endParaRPr lang="en-US" sz="1600" dirty="0"/>
-          </a:p>
-          <a:p>
-            <a:pPr marL="342900" indent="-342900">
-              <a:buSzPct val="100000"/>
-              <a:buChar char="•"/>
-            </a:pPr>
-            <a:r>
-              <a:rPr lang="en-US" sz="1600" dirty="0">
+            <a:endParaRPr lang="en-US" sz="1500" dirty="0"/>
+          </a:p>
+          <a:p>
+            <a:pPr>
+              <a:spcAft>
+                <a:spcPts val="800"/>
+              </a:spcAft>
+            </a:pPr>
+            <a:r>
+              <a:rPr lang="en-US" sz="1500" dirty="0">
                 <a:solidFill>
                   <a:srgbClr val="E8ECF4"/>
                 </a:solidFill>
@@ -2203,15 +2515,16 @@
               </a:rPr>
               <a:t>Proposed Solution</a:t>
             </a:r>
-            <a:endParaRPr lang="en-US" sz="1600" dirty="0"/>
-          </a:p>
-          <a:p>
-            <a:pPr marL="342900" indent="-342900">
-              <a:buSzPct val="100000"/>
-              <a:buChar char="•"/>
-            </a:pPr>
-            <a:r>
-              <a:rPr lang="en-US" sz="1600" dirty="0">
+            <a:endParaRPr lang="en-US" sz="1500" dirty="0"/>
+          </a:p>
+          <a:p>
+            <a:pPr>
+              <a:spcAft>
+                <a:spcPts val="800"/>
+              </a:spcAft>
+            </a:pPr>
+            <a:r>
+              <a:rPr lang="en-US" sz="1500" dirty="0">
                 <a:solidFill>
                   <a:srgbClr val="E8ECF4"/>
                 </a:solidFill>
@@ -2219,17 +2532,18 @@
                 <a:ea typeface="Calibri" pitchFamily="34" charset="-122"/>
                 <a:cs typeface="Calibri" pitchFamily="34" charset="-120"/>
               </a:rPr>
-              <a:t>Deliverables</a:t>
-            </a:r>
-            <a:endParaRPr lang="en-US" sz="1600" dirty="0"/>
-          </a:p>
-          <a:p>
-            <a:pPr marL="342900" indent="-342900">
-              <a:buSzPct val="100000"/>
-              <a:buChar char="•"/>
-            </a:pPr>
-            <a:r>
-              <a:rPr lang="en-US" sz="1600" dirty="0">
+              <a:t>Key Deliverables</a:t>
+            </a:r>
+            <a:endParaRPr lang="en-US" sz="1500" dirty="0"/>
+          </a:p>
+          <a:p>
+            <a:pPr>
+              <a:spcAft>
+                <a:spcPts val="800"/>
+              </a:spcAft>
+            </a:pPr>
+            <a:r>
+              <a:rPr lang="en-US" sz="1500" dirty="0">
                 <a:solidFill>
                   <a:srgbClr val="E8ECF4"/>
                 </a:solidFill>
@@ -2237,17 +2551,18 @@
                 <a:ea typeface="Calibri" pitchFamily="34" charset="-122"/>
                 <a:cs typeface="Calibri" pitchFamily="34" charset="-120"/>
               </a:rPr>
-              <a:t>Timeline &amp; Budget</a:t>
-            </a:r>
-            <a:endParaRPr lang="en-US" sz="1600" dirty="0"/>
-          </a:p>
-          <a:p>
-            <a:pPr marL="342900" indent="-342900">
-              <a:buSzPct val="100000"/>
-              <a:buChar char="•"/>
-            </a:pPr>
-            <a:r>
-              <a:rPr lang="en-US" sz="1600" dirty="0">
+              <a:t>Technical Approach</a:t>
+            </a:r>
+            <a:endParaRPr lang="en-US" sz="1500" dirty="0"/>
+          </a:p>
+          <a:p>
+            <a:pPr>
+              <a:spcAft>
+                <a:spcPts val="800"/>
+              </a:spcAft>
+            </a:pPr>
+            <a:r>
+              <a:rPr lang="en-US" sz="1500" dirty="0">
                 <a:solidFill>
                   <a:srgbClr val="E8ECF4"/>
                 </a:solidFill>
@@ -2255,9 +2570,28 @@
                 <a:ea typeface="Calibri" pitchFamily="34" charset="-122"/>
                 <a:cs typeface="Calibri" pitchFamily="34" charset="-120"/>
               </a:rPr>
+              <a:t>Timeline &amp; Investment</a:t>
+            </a:r>
+            <a:endParaRPr lang="en-US" sz="1500" dirty="0"/>
+          </a:p>
+          <a:p>
+            <a:pPr>
+              <a:spcAft>
+                <a:spcPts val="800"/>
+              </a:spcAft>
+            </a:pPr>
+            <a:r>
+              <a:rPr lang="en-US" sz="1500" dirty="0">
+                <a:solidFill>
+                  <a:srgbClr val="E8ECF4"/>
+                </a:solidFill>
+                <a:latin typeface="Calibri" pitchFamily="34" charset="0"/>
+                <a:ea typeface="Calibri" pitchFamily="34" charset="-122"/>
+                <a:cs typeface="Calibri" pitchFamily="34" charset="-120"/>
+              </a:rPr>
               <a:t>Next Steps</a:t>
             </a:r>
-            <a:endParaRPr lang="en-US" sz="1600" dirty="0"/>
+            <a:endParaRPr lang="en-US" sz="1500" dirty="0"/>
           </a:p>
         </p:txBody>
       </p:sp>
@@ -2295,7 +2629,27 @@
         <p:spPr>
           <a:xfrm>
             <a:off x="0" y="0"/>
-            <a:ext cx="12192000" cy="1005840"/>
+            <a:ext cx="109728" cy="6858000"/>
+          </a:xfrm>
+          <a:prstGeom prst="rect">
+            <a:avLst/>
+          </a:prstGeom>
+          <a:solidFill>
+            <a:srgbClr val="4F6EF7"/>
+          </a:solidFill>
+          <a:ln/>
+        </p:spPr>
+      </p:sp>
+      <p:sp>
+        <p:nvSpPr>
+          <p:cNvPr id="3" name="Shape 1"/>
+          <p:cNvSpPr/>
+          <p:nvPr/>
+        </p:nvSpPr>
+        <p:spPr>
+          <a:xfrm>
+            <a:off x="109728" y="0"/>
+            <a:ext cx="12079224" cy="914400"/>
           </a:xfrm>
           <a:prstGeom prst="rect">
             <a:avLst/>
@@ -2308,14 +2662,14 @@
       </p:sp>
       <p:sp>
         <p:nvSpPr>
-          <p:cNvPr id="3" name="Text 1"/>
-          <p:cNvSpPr/>
-          <p:nvPr/>
-        </p:nvSpPr>
-        <p:spPr>
-          <a:xfrm>
-            <a:off x="365760" y="164592"/>
-            <a:ext cx="10607040" cy="685800"/>
+          <p:cNvPr id="4" name="Text 2"/>
+          <p:cNvSpPr/>
+          <p:nvPr/>
+        </p:nvSpPr>
+        <p:spPr>
+          <a:xfrm>
+            <a:off x="347472" y="109728"/>
+            <a:ext cx="11612880" cy="694944"/>
           </a:xfrm>
           <a:prstGeom prst="rect">
             <a:avLst/>
@@ -2331,7 +2685,7 @@
               <a:buNone/>
             </a:pPr>
             <a:r>
-              <a:rPr lang="en-US" sz="2400" b="1" dirty="0">
+              <a:rPr lang="en-US" sz="2200" b="1" dirty="0">
                 <a:solidFill>
                   <a:srgbClr val="E8ECF4"/>
                 </a:solidFill>
@@ -2341,20 +2695,20 @@
               </a:rPr>
               <a:t>Problem / Opportunity</a:t>
             </a:r>
-            <a:endParaRPr lang="en-US" sz="2400" dirty="0"/>
-          </a:p>
-        </p:txBody>
-      </p:sp>
-      <p:sp>
-        <p:nvSpPr>
-          <p:cNvPr id="4" name="Text 2"/>
-          <p:cNvSpPr/>
-          <p:nvPr/>
-        </p:nvSpPr>
-        <p:spPr>
-          <a:xfrm>
-            <a:off x="457200" y="1188720"/>
-            <a:ext cx="10424160" cy="4754880"/>
+            <a:endParaRPr lang="en-US" sz="2200" dirty="0"/>
+          </a:p>
+        </p:txBody>
+      </p:sp>
+      <p:sp>
+        <p:nvSpPr>
+          <p:cNvPr id="5" name="Text 3"/>
+          <p:cNvSpPr/>
+          <p:nvPr/>
+        </p:nvSpPr>
+        <p:spPr>
+          <a:xfrm>
+            <a:off x="457200" y="1097280"/>
+            <a:ext cx="11430000" cy="5212080"/>
           </a:xfrm>
           <a:prstGeom prst="rect">
             <a:avLst/>
@@ -2366,12 +2720,13 @@
           <a:bodyPr wrap="square" rtlCol="0" anchor="t"/>
           <a:lstStyle/>
           <a:p>
-            <a:pPr marL="342900" indent="-342900">
-              <a:buSzPct val="100000"/>
-              <a:buChar char="•"/>
-            </a:pPr>
-            <a:r>
-              <a:rPr lang="en-US" sz="1600" dirty="0">
+            <a:pPr>
+              <a:spcAft>
+                <a:spcPts val="800"/>
+              </a:spcAft>
+            </a:pPr>
+            <a:r>
+              <a:rPr lang="en-US" sz="1500" dirty="0">
                 <a:solidFill>
                   <a:srgbClr val="E8ECF4"/>
                 </a:solidFill>
@@ -2379,17 +2734,18 @@
                 <a:ea typeface="Calibri" pitchFamily="34" charset="-122"/>
                 <a:cs typeface="Calibri" pitchFamily="34" charset="-120"/>
               </a:rPr>
-              <a:t>{{Problem statement}}</a:t>
-            </a:r>
-            <a:endParaRPr lang="en-US" sz="1600" dirty="0"/>
-          </a:p>
-          <a:p>
-            <a:pPr marL="342900" indent="-342900">
-              <a:buSzPct val="100000"/>
-              <a:buChar char="•"/>
-            </a:pPr>
-            <a:r>
-              <a:rPr lang="en-US" sz="1600" dirty="0">
+              <a:t>{{Describe the core problem in 8–12 words, outcome-oriented}}</a:t>
+            </a:r>
+            <a:endParaRPr lang="en-US" sz="1500" dirty="0"/>
+          </a:p>
+          <a:p>
+            <a:pPr>
+              <a:spcAft>
+                <a:spcPts val="800"/>
+              </a:spcAft>
+            </a:pPr>
+            <a:r>
+              <a:rPr lang="en-US" sz="1500" dirty="0">
                 <a:solidFill>
                   <a:srgbClr val="E8ECF4"/>
                 </a:solidFill>
@@ -2397,17 +2753,18 @@
                 <a:ea typeface="Calibri" pitchFamily="34" charset="-122"/>
                 <a:cs typeface="Calibri" pitchFamily="34" charset="-120"/>
               </a:rPr>
-              <a:t>{{Current pain points}}</a:t>
-            </a:r>
-            <a:endParaRPr lang="en-US" sz="1600" dirty="0"/>
-          </a:p>
-          <a:p>
-            <a:pPr marL="342900" indent="-342900">
-              <a:buSzPct val="100000"/>
-              <a:buChar char="•"/>
-            </a:pPr>
-            <a:r>
-              <a:rPr lang="en-US" sz="1600" dirty="0">
+              <a:t>{{Current pain point — quantify if possible: "$X lost per month"}}</a:t>
+            </a:r>
+            <a:endParaRPr lang="en-US" sz="1500" dirty="0"/>
+          </a:p>
+          <a:p>
+            <a:pPr>
+              <a:spcAft>
+                <a:spcPts val="800"/>
+              </a:spcAft>
+            </a:pPr>
+            <a:r>
+              <a:rPr lang="en-US" sz="1500" dirty="0">
                 <a:solidFill>
                   <a:srgbClr val="E8ECF4"/>
                 </a:solidFill>
@@ -2415,9 +2772,9 @@
                 <a:ea typeface="Calibri" pitchFamily="34" charset="-122"/>
                 <a:cs typeface="Calibri" pitchFamily="34" charset="-120"/>
               </a:rPr>
-              <a:t>{{Business impact}}</a:t>
-            </a:r>
-            <a:endParaRPr lang="en-US" sz="1600" dirty="0"/>
+              <a:t>{{Business impact if unresolved: risk, cost, missed opportunity}}</a:t>
+            </a:r>
+            <a:endParaRPr lang="en-US" sz="1500" dirty="0"/>
           </a:p>
         </p:txBody>
       </p:sp>
@@ -2455,7 +2812,27 @@
         <p:spPr>
           <a:xfrm>
             <a:off x="0" y="0"/>
-            <a:ext cx="12192000" cy="1005840"/>
+            <a:ext cx="109728" cy="6858000"/>
+          </a:xfrm>
+          <a:prstGeom prst="rect">
+            <a:avLst/>
+          </a:prstGeom>
+          <a:solidFill>
+            <a:srgbClr val="4F6EF7"/>
+          </a:solidFill>
+          <a:ln/>
+        </p:spPr>
+      </p:sp>
+      <p:sp>
+        <p:nvSpPr>
+          <p:cNvPr id="3" name="Shape 1"/>
+          <p:cNvSpPr/>
+          <p:nvPr/>
+        </p:nvSpPr>
+        <p:spPr>
+          <a:xfrm>
+            <a:off x="109728" y="0"/>
+            <a:ext cx="12079224" cy="914400"/>
           </a:xfrm>
           <a:prstGeom prst="rect">
             <a:avLst/>
@@ -2468,14 +2845,14 @@
       </p:sp>
       <p:sp>
         <p:nvSpPr>
-          <p:cNvPr id="3" name="Text 1"/>
-          <p:cNvSpPr/>
-          <p:nvPr/>
-        </p:nvSpPr>
-        <p:spPr>
-          <a:xfrm>
-            <a:off x="365760" y="164592"/>
-            <a:ext cx="10607040" cy="685800"/>
+          <p:cNvPr id="4" name="Text 2"/>
+          <p:cNvSpPr/>
+          <p:nvPr/>
+        </p:nvSpPr>
+        <p:spPr>
+          <a:xfrm>
+            <a:off x="347472" y="109728"/>
+            <a:ext cx="11612880" cy="694944"/>
           </a:xfrm>
           <a:prstGeom prst="rect">
             <a:avLst/>
@@ -2491,7 +2868,7 @@
               <a:buNone/>
             </a:pPr>
             <a:r>
-              <a:rPr lang="en-US" sz="2400" b="1" dirty="0">
+              <a:rPr lang="en-US" sz="2200" b="1" dirty="0">
                 <a:solidFill>
                   <a:srgbClr val="E8ECF4"/>
                 </a:solidFill>
@@ -2501,20 +2878,20 @@
               </a:rPr>
               <a:t>Proposed Solution</a:t>
             </a:r>
-            <a:endParaRPr lang="en-US" sz="2400" dirty="0"/>
-          </a:p>
-        </p:txBody>
-      </p:sp>
-      <p:sp>
-        <p:nvSpPr>
-          <p:cNvPr id="4" name="Text 2"/>
-          <p:cNvSpPr/>
-          <p:nvPr/>
-        </p:nvSpPr>
-        <p:spPr>
-          <a:xfrm>
-            <a:off x="457200" y="1188720"/>
-            <a:ext cx="10424160" cy="4754880"/>
+            <a:endParaRPr lang="en-US" sz="2200" dirty="0"/>
+          </a:p>
+        </p:txBody>
+      </p:sp>
+      <p:sp>
+        <p:nvSpPr>
+          <p:cNvPr id="5" name="Text 3"/>
+          <p:cNvSpPr/>
+          <p:nvPr/>
+        </p:nvSpPr>
+        <p:spPr>
+          <a:xfrm>
+            <a:off x="457200" y="1097280"/>
+            <a:ext cx="11430000" cy="5212080"/>
           </a:xfrm>
           <a:prstGeom prst="rect">
             <a:avLst/>
@@ -2526,12 +2903,13 @@
           <a:bodyPr wrap="square" rtlCol="0" anchor="t"/>
           <a:lstStyle/>
           <a:p>
-            <a:pPr marL="342900" indent="-342900">
-              <a:buSzPct val="100000"/>
-              <a:buChar char="•"/>
-            </a:pPr>
-            <a:r>
-              <a:rPr lang="en-US" sz="1600" dirty="0">
+            <a:pPr>
+              <a:spcAft>
+                <a:spcPts val="800"/>
+              </a:spcAft>
+            </a:pPr>
+            <a:r>
+              <a:rPr lang="en-US" sz="1500" dirty="0">
                 <a:solidFill>
                   <a:srgbClr val="E8ECF4"/>
                 </a:solidFill>
@@ -2539,17 +2917,18 @@
                 <a:ea typeface="Calibri" pitchFamily="34" charset="-122"/>
                 <a:cs typeface="Calibri" pitchFamily="34" charset="-120"/>
               </a:rPr>
-              <a:t>{{Solution overview}}</a:t>
-            </a:r>
-            <a:endParaRPr lang="en-US" sz="1600" dirty="0"/>
-          </a:p>
-          <a:p>
-            <a:pPr marL="342900" indent="-342900">
-              <a:buSzPct val="100000"/>
-              <a:buChar char="•"/>
-            </a:pPr>
-            <a:r>
-              <a:rPr lang="en-US" sz="1600" dirty="0">
+              <a:t>{{Lead with the key capability: "A platform that automates..."}}</a:t>
+            </a:r>
+            <a:endParaRPr lang="en-US" sz="1500" dirty="0"/>
+          </a:p>
+          <a:p>
+            <a:pPr>
+              <a:spcAft>
+                <a:spcPts val="800"/>
+              </a:spcAft>
+            </a:pPr>
+            <a:r>
+              <a:rPr lang="en-US" sz="1500" dirty="0">
                 <a:solidFill>
                   <a:srgbClr val="E8ECF4"/>
                 </a:solidFill>
@@ -2557,17 +2936,18 @@
                 <a:ea typeface="Calibri" pitchFamily="34" charset="-122"/>
                 <a:cs typeface="Calibri" pitchFamily="34" charset="-120"/>
               </a:rPr>
-              <a:t>{{Key approach}}</a:t>
-            </a:r>
-            <a:endParaRPr lang="en-US" sz="1600" dirty="0"/>
-          </a:p>
-          <a:p>
-            <a:pPr marL="342900" indent="-342900">
-              <a:buSzPct val="100000"/>
-              <a:buChar char="•"/>
-            </a:pPr>
-            <a:r>
-              <a:rPr lang="en-US" sz="1600" dirty="0">
+              <a:t>{{How the approach is different from what they tried before}}</a:t>
+            </a:r>
+            <a:endParaRPr lang="en-US" sz="1500" dirty="0"/>
+          </a:p>
+          <a:p>
+            <a:pPr>
+              <a:spcAft>
+                <a:spcPts val="800"/>
+              </a:spcAft>
+            </a:pPr>
+            <a:r>
+              <a:rPr lang="en-US" sz="1500" dirty="0">
                 <a:solidFill>
                   <a:srgbClr val="E8ECF4"/>
                 </a:solidFill>
@@ -2575,9 +2955,9 @@
                 <a:ea typeface="Calibri" pitchFamily="34" charset="-122"/>
                 <a:cs typeface="Calibri" pitchFamily="34" charset="-120"/>
               </a:rPr>
-              <a:t>{{Unique value}}</a:t>
-            </a:r>
-            <a:endParaRPr lang="en-US" sz="1600" dirty="0"/>
+              <a:t>{{The core value proposition in one outcome sentence}}</a:t>
+            </a:r>
+            <a:endParaRPr lang="en-US" sz="1500" dirty="0"/>
           </a:p>
         </p:txBody>
       </p:sp>
@@ -2615,7 +2995,7 @@
         <p:spPr>
           <a:xfrm>
             <a:off x="0" y="0"/>
-            <a:ext cx="12192000" cy="1005840"/>
+            <a:ext cx="12192000" cy="914400"/>
           </a:xfrm>
           <a:prstGeom prst="rect">
             <a:avLst/>
@@ -2634,8 +3014,8 @@
         </p:nvSpPr>
         <p:spPr>
           <a:xfrm>
-            <a:off x="365760" y="164592"/>
-            <a:ext cx="10607040" cy="685800"/>
+            <a:off x="347472" y="109728"/>
+            <a:ext cx="11612880" cy="694944"/>
           </a:xfrm>
           <a:prstGeom prst="rect">
             <a:avLst/>
@@ -2651,7 +3031,7 @@
               <a:buNone/>
             </a:pPr>
             <a:r>
-              <a:rPr lang="en-US" sz="2400" b="1" dirty="0">
+              <a:rPr lang="en-US" sz="2200" b="1" dirty="0">
                 <a:solidFill>
                   <a:srgbClr val="E8ECF4"/>
                 </a:solidFill>
@@ -2659,22 +3039,42 @@
                 <a:ea typeface="Calibri" pitchFamily="34" charset="-122"/>
                 <a:cs typeface="Calibri" pitchFamily="34" charset="-120"/>
               </a:rPr>
-              <a:t>Key Deliverables</a:t>
-            </a:r>
-            <a:endParaRPr lang="en-US" sz="2400" dirty="0"/>
-          </a:p>
-        </p:txBody>
-      </p:sp>
-      <p:sp>
-        <p:nvSpPr>
-          <p:cNvPr id="4" name="Text 2"/>
-          <p:cNvSpPr/>
-          <p:nvPr/>
-        </p:nvSpPr>
-        <p:spPr>
-          <a:xfrm>
-            <a:off x="457200" y="1188720"/>
-            <a:ext cx="10424160" cy="4754880"/>
+              <a:t>Scope &amp; Deliverables</a:t>
+            </a:r>
+            <a:endParaRPr lang="en-US" sz="2200" dirty="0"/>
+          </a:p>
+        </p:txBody>
+      </p:sp>
+      <p:sp>
+        <p:nvSpPr>
+          <p:cNvPr id="4" name="Shape 2"/>
+          <p:cNvSpPr/>
+          <p:nvPr/>
+        </p:nvSpPr>
+        <p:spPr>
+          <a:xfrm>
+            <a:off x="5989320" y="1051560"/>
+            <a:ext cx="36576" cy="5303520"/>
+          </a:xfrm>
+          <a:prstGeom prst="rect">
+            <a:avLst/>
+          </a:prstGeom>
+          <a:solidFill>
+            <a:srgbClr val="5A637A"/>
+          </a:solidFill>
+          <a:ln/>
+        </p:spPr>
+      </p:sp>
+      <p:sp>
+        <p:nvSpPr>
+          <p:cNvPr id="5" name="Text 3"/>
+          <p:cNvSpPr/>
+          <p:nvPr/>
+        </p:nvSpPr>
+        <p:spPr>
+          <a:xfrm>
+            <a:off x="347472" y="1051560"/>
+            <a:ext cx="5486400" cy="411480"/>
           </a:xfrm>
           <a:prstGeom prst="rect">
             <a:avLst/>
@@ -2683,15 +3083,57 @@
           <a:ln/>
         </p:spPr>
         <p:txBody>
+          <a:bodyPr wrap="square" rtlCol="0" anchor="ctr"/>
+          <a:lstStyle/>
+          <a:p>
+            <a:pPr indent="0" marL="0">
+              <a:buNone/>
+            </a:pPr>
+            <a:r>
+              <a:rPr lang="en-US" sz="1300" b="1" dirty="0">
+                <a:solidFill>
+                  <a:srgbClr val="4F6EF7"/>
+                </a:solidFill>
+                <a:latin typeface="Calibri" pitchFamily="34" charset="0"/>
+                <a:ea typeface="Calibri" pitchFamily="34" charset="-122"/>
+                <a:cs typeface="Calibri" pitchFamily="34" charset="-120"/>
+              </a:rPr>
+              <a:t>In Scope</a:t>
+            </a:r>
+            <a:endParaRPr lang="en-US" sz="1300" dirty="0"/>
+          </a:p>
+        </p:txBody>
+      </p:sp>
+      <p:sp>
+        <p:nvSpPr>
+          <p:cNvPr id="6" name="Text 4"/>
+          <p:cNvSpPr/>
+          <p:nvPr/>
+        </p:nvSpPr>
+        <p:spPr>
+          <a:xfrm>
+            <a:off x="347472" y="1554480"/>
+            <a:ext cx="5486400" cy="4572000"/>
+          </a:xfrm>
+          <a:prstGeom prst="rect">
+            <a:avLst/>
+          </a:prstGeom>
+          <a:noFill/>
+          <a:ln/>
+        </p:spPr>
+        <p:txBody>
           <a:bodyPr wrap="square" rtlCol="0" anchor="t"/>
           <a:lstStyle/>
           <a:p>
             <a:pPr marL="342900" indent="-342900">
+              <a:spcAft>
+                <a:spcPts val="700"/>
+              </a:spcAft>
               <a:buSzPct val="100000"/>
               <a:buChar char="•"/>
             </a:pPr>
             <a:r>
-              <a:rPr lang="en-US" sz="1600" dirty="0">
+              <a:rPr lang="en-US" sz="1400" dirty="0">
                 <a:solidFill>
                   <a:srgbClr val="E8ECF4"/>
                 </a:solidFill>
@@ -2701,15 +3143,18 @@
               </a:rPr>
               <a:t>{{Deliverable 1}}</a:t>
             </a:r>
-            <a:endParaRPr lang="en-US" sz="1600" dirty="0"/>
+            <a:endParaRPr lang="en-US" sz="1400" dirty="0"/>
           </a:p>
           <a:p>
             <a:pPr marL="342900" indent="-342900">
+              <a:spcAft>
+                <a:spcPts val="700"/>
+              </a:spcAft>
               <a:buSzPct val="100000"/>
               <a:buChar char="•"/>
             </a:pPr>
             <a:r>
-              <a:rPr lang="en-US" sz="1600" dirty="0">
+              <a:rPr lang="en-US" sz="1400" dirty="0">
                 <a:solidFill>
                   <a:srgbClr val="E8ECF4"/>
                 </a:solidFill>
@@ -2719,15 +3164,18 @@
               </a:rPr>
               <a:t>{{Deliverable 2}}</a:t>
             </a:r>
-            <a:endParaRPr lang="en-US" sz="1600" dirty="0"/>
+            <a:endParaRPr lang="en-US" sz="1400" dirty="0"/>
           </a:p>
           <a:p>
             <a:pPr marL="342900" indent="-342900">
+              <a:spcAft>
+                <a:spcPts val="700"/>
+              </a:spcAft>
               <a:buSzPct val="100000"/>
               <a:buChar char="•"/>
             </a:pPr>
             <a:r>
-              <a:rPr lang="en-US" sz="1600" dirty="0">
+              <a:rPr lang="en-US" sz="1400" dirty="0">
                 <a:solidFill>
                   <a:srgbClr val="E8ECF4"/>
                 </a:solidFill>
@@ -2737,7 +3185,131 @@
               </a:rPr>
               <a:t>{{Deliverable 3}}</a:t>
             </a:r>
-            <a:endParaRPr lang="en-US" sz="1600" dirty="0"/>
+            <a:endParaRPr lang="en-US" sz="1400" dirty="0"/>
+          </a:p>
+        </p:txBody>
+      </p:sp>
+      <p:sp>
+        <p:nvSpPr>
+          <p:cNvPr id="7" name="Text 5"/>
+          <p:cNvSpPr/>
+          <p:nvPr/>
+        </p:nvSpPr>
+        <p:spPr>
+          <a:xfrm>
+            <a:off x="6309360" y="1051560"/>
+            <a:ext cx="5486400" cy="411480"/>
+          </a:xfrm>
+          <a:prstGeom prst="rect">
+            <a:avLst/>
+          </a:prstGeom>
+          <a:noFill/>
+          <a:ln/>
+        </p:spPr>
+        <p:txBody>
+          <a:bodyPr wrap="square" rtlCol="0" anchor="ctr"/>
+          <a:lstStyle/>
+          <a:p>
+            <a:pPr indent="0" marL="0">
+              <a:buNone/>
+            </a:pPr>
+            <a:r>
+              <a:rPr lang="en-US" sz="1300" b="1" dirty="0">
+                <a:solidFill>
+                  <a:srgbClr val="4F6EF7"/>
+                </a:solidFill>
+                <a:latin typeface="Calibri" pitchFamily="34" charset="0"/>
+                <a:ea typeface="Calibri" pitchFamily="34" charset="-122"/>
+                <a:cs typeface="Calibri" pitchFamily="34" charset="-120"/>
+              </a:rPr>
+              <a:t>Out of Scope</a:t>
+            </a:r>
+            <a:endParaRPr lang="en-US" sz="1300" dirty="0"/>
+          </a:p>
+        </p:txBody>
+      </p:sp>
+      <p:sp>
+        <p:nvSpPr>
+          <p:cNvPr id="8" name="Text 6"/>
+          <p:cNvSpPr/>
+          <p:nvPr/>
+        </p:nvSpPr>
+        <p:spPr>
+          <a:xfrm>
+            <a:off x="6309360" y="1554480"/>
+            <a:ext cx="5486400" cy="4572000"/>
+          </a:xfrm>
+          <a:prstGeom prst="rect">
+            <a:avLst/>
+          </a:prstGeom>
+          <a:noFill/>
+          <a:ln/>
+        </p:spPr>
+        <p:txBody>
+          <a:bodyPr wrap="square" rtlCol="0" anchor="t"/>
+          <a:lstStyle/>
+          <a:p>
+            <a:pPr marL="342900" indent="-342900">
+              <a:spcAft>
+                <a:spcPts val="700"/>
+              </a:spcAft>
+              <a:buSzPct val="100000"/>
+              <a:buChar char="•"/>
+            </a:pPr>
+            <a:r>
+              <a:rPr lang="en-US" sz="1400" dirty="0">
+                <a:solidFill>
+                  <a:srgbClr val="E8ECF4"/>
+                </a:solidFill>
+                <a:latin typeface="Calibri" pitchFamily="34" charset="0"/>
+                <a:ea typeface="Calibri" pitchFamily="34" charset="-122"/>
+                <a:cs typeface="Calibri" pitchFamily="34" charset="-120"/>
+              </a:rPr>
+              <a:t>{{Exclusion 1}}</a:t>
+            </a:r>
+            <a:endParaRPr lang="en-US" sz="1400" dirty="0"/>
+          </a:p>
+          <a:p>
+            <a:pPr marL="342900" indent="-342900">
+              <a:spcAft>
+                <a:spcPts val="700"/>
+              </a:spcAft>
+              <a:buSzPct val="100000"/>
+              <a:buChar char="•"/>
+            </a:pPr>
+            <a:r>
+              <a:rPr lang="en-US" sz="1400" dirty="0">
+                <a:solidFill>
+                  <a:srgbClr val="E8ECF4"/>
+                </a:solidFill>
+                <a:latin typeface="Calibri" pitchFamily="34" charset="0"/>
+                <a:ea typeface="Calibri" pitchFamily="34" charset="-122"/>
+                <a:cs typeface="Calibri" pitchFamily="34" charset="-120"/>
+              </a:rPr>
+              <a:t>{{Exclusion 2}}</a:t>
+            </a:r>
+            <a:endParaRPr lang="en-US" sz="1400" dirty="0"/>
+          </a:p>
+          <a:p>
+            <a:pPr marL="342900" indent="-342900">
+              <a:spcAft>
+                <a:spcPts val="700"/>
+              </a:spcAft>
+              <a:buSzPct val="100000"/>
+              <a:buChar char="•"/>
+            </a:pPr>
+            <a:r>
+              <a:rPr lang="en-US" sz="1400" dirty="0">
+                <a:solidFill>
+                  <a:srgbClr val="E8ECF4"/>
+                </a:solidFill>
+                <a:latin typeface="Calibri" pitchFamily="34" charset="0"/>
+                <a:ea typeface="Calibri" pitchFamily="34" charset="-122"/>
+                <a:cs typeface="Calibri" pitchFamily="34" charset="-120"/>
+              </a:rPr>
+              <a:t>{{Exclusion 3}}</a:t>
+            </a:r>
+            <a:endParaRPr lang="en-US" sz="1400" dirty="0"/>
           </a:p>
         </p:txBody>
       </p:sp>
@@ -2775,7 +3347,27 @@
         <p:spPr>
           <a:xfrm>
             <a:off x="0" y="0"/>
-            <a:ext cx="12192000" cy="1005840"/>
+            <a:ext cx="109728" cy="6858000"/>
+          </a:xfrm>
+          <a:prstGeom prst="rect">
+            <a:avLst/>
+          </a:prstGeom>
+          <a:solidFill>
+            <a:srgbClr val="4F6EF7"/>
+          </a:solidFill>
+          <a:ln/>
+        </p:spPr>
+      </p:sp>
+      <p:sp>
+        <p:nvSpPr>
+          <p:cNvPr id="3" name="Shape 1"/>
+          <p:cNvSpPr/>
+          <p:nvPr/>
+        </p:nvSpPr>
+        <p:spPr>
+          <a:xfrm>
+            <a:off x="109728" y="0"/>
+            <a:ext cx="12079224" cy="914400"/>
           </a:xfrm>
           <a:prstGeom prst="rect">
             <a:avLst/>
@@ -2788,14 +3380,14 @@
       </p:sp>
       <p:sp>
         <p:nvSpPr>
-          <p:cNvPr id="3" name="Text 1"/>
-          <p:cNvSpPr/>
-          <p:nvPr/>
-        </p:nvSpPr>
-        <p:spPr>
-          <a:xfrm>
-            <a:off x="365760" y="164592"/>
-            <a:ext cx="10607040" cy="685800"/>
+          <p:cNvPr id="4" name="Text 2"/>
+          <p:cNvSpPr/>
+          <p:nvPr/>
+        </p:nvSpPr>
+        <p:spPr>
+          <a:xfrm>
+            <a:off x="347472" y="109728"/>
+            <a:ext cx="11612880" cy="694944"/>
           </a:xfrm>
           <a:prstGeom prst="rect">
             <a:avLst/>
@@ -2811,7 +3403,7 @@
               <a:buNone/>
             </a:pPr>
             <a:r>
-              <a:rPr lang="en-US" sz="2400" b="1" dirty="0">
+              <a:rPr lang="en-US" sz="2200" b="1" dirty="0">
                 <a:solidFill>
                   <a:srgbClr val="E8ECF4"/>
                 </a:solidFill>
@@ -2821,20 +3413,20 @@
               </a:rPr>
               <a:t>Technical Approach</a:t>
             </a:r>
-            <a:endParaRPr lang="en-US" sz="2400" dirty="0"/>
-          </a:p>
-        </p:txBody>
-      </p:sp>
-      <p:sp>
-        <p:nvSpPr>
-          <p:cNvPr id="4" name="Text 2"/>
-          <p:cNvSpPr/>
-          <p:nvPr/>
-        </p:nvSpPr>
-        <p:spPr>
-          <a:xfrm>
-            <a:off x="457200" y="1188720"/>
-            <a:ext cx="10424160" cy="4754880"/>
+            <a:endParaRPr lang="en-US" sz="2200" dirty="0"/>
+          </a:p>
+        </p:txBody>
+      </p:sp>
+      <p:sp>
+        <p:nvSpPr>
+          <p:cNvPr id="5" name="Text 3"/>
+          <p:cNvSpPr/>
+          <p:nvPr/>
+        </p:nvSpPr>
+        <p:spPr>
+          <a:xfrm>
+            <a:off x="457200" y="1097280"/>
+            <a:ext cx="11430000" cy="5212080"/>
           </a:xfrm>
           <a:prstGeom prst="rect">
             <a:avLst/>
@@ -2846,12 +3438,13 @@
           <a:bodyPr wrap="square" rtlCol="0" anchor="t"/>
           <a:lstStyle/>
           <a:p>
-            <a:pPr marL="342900" indent="-342900">
-              <a:buSzPct val="100000"/>
-              <a:buChar char="•"/>
-            </a:pPr>
-            <a:r>
-              <a:rPr lang="en-US" sz="1600" dirty="0">
+            <a:pPr>
+              <a:spcAft>
+                <a:spcPts val="800"/>
+              </a:spcAft>
+            </a:pPr>
+            <a:r>
+              <a:rPr lang="en-US" sz="1500" dirty="0">
                 <a:solidFill>
                   <a:srgbClr val="E8ECF4"/>
                 </a:solidFill>
@@ -2859,17 +3452,18 @@
                 <a:ea typeface="Calibri" pitchFamily="34" charset="-122"/>
                 <a:cs typeface="Calibri" pitchFamily="34" charset="-120"/>
               </a:rPr>
-              <a:t>{{Architecture overview}}</a:t>
-            </a:r>
-            <a:endParaRPr lang="en-US" sz="1600" dirty="0"/>
-          </a:p>
-          <a:p>
-            <a:pPr marL="342900" indent="-342900">
-              <a:buSzPct val="100000"/>
-              <a:buChar char="•"/>
-            </a:pPr>
-            <a:r>
-              <a:rPr lang="en-US" sz="1600" dirty="0">
+              <a:t>{{Architecture decision + rationale in one sentence}}</a:t>
+            </a:r>
+            <a:endParaRPr lang="en-US" sz="1500" dirty="0"/>
+          </a:p>
+          <a:p>
+            <a:pPr>
+              <a:spcAft>
+                <a:spcPts val="800"/>
+              </a:spcAft>
+            </a:pPr>
+            <a:r>
+              <a:rPr lang="en-US" sz="1500" dirty="0">
                 <a:solidFill>
                   <a:srgbClr val="E8ECF4"/>
                 </a:solidFill>
@@ -2877,17 +3471,18 @@
                 <a:ea typeface="Calibri" pitchFamily="34" charset="-122"/>
                 <a:cs typeface="Calibri" pitchFamily="34" charset="-120"/>
               </a:rPr>
-              <a:t>{{Tech stack}}</a:t>
-            </a:r>
-            <a:endParaRPr lang="en-US" sz="1600" dirty="0"/>
-          </a:p>
-          <a:p>
-            <a:pPr marL="342900" indent="-342900">
-              <a:buSzPct val="100000"/>
-              <a:buChar char="•"/>
-            </a:pPr>
-            <a:r>
-              <a:rPr lang="en-US" sz="1600" dirty="0">
+              <a:t>{{Tech stack choice: "Built on X because Y"}}</a:t>
+            </a:r>
+            <a:endParaRPr lang="en-US" sz="1500" dirty="0"/>
+          </a:p>
+          <a:p>
+            <a:pPr>
+              <a:spcAft>
+                <a:spcPts val="800"/>
+              </a:spcAft>
+            </a:pPr>
+            <a:r>
+              <a:rPr lang="en-US" sz="1500" dirty="0">
                 <a:solidFill>
                   <a:srgbClr val="E8ECF4"/>
                 </a:solidFill>
@@ -2895,9 +3490,9 @@
                 <a:ea typeface="Calibri" pitchFamily="34" charset="-122"/>
                 <a:cs typeface="Calibri" pitchFamily="34" charset="-120"/>
               </a:rPr>
-              <a:t>{{Integration points}}</a:t>
-            </a:r>
-            <a:endParaRPr lang="en-US" sz="1600" dirty="0"/>
+              <a:t>{{Integration with existing systems: timeline + effort}}</a:t>
+            </a:r>
+            <a:endParaRPr lang="en-US" sz="1500" dirty="0"/>
           </a:p>
         </p:txBody>
       </p:sp>
@@ -2935,7 +3530,7 @@
         <p:spPr>
           <a:xfrm>
             <a:off x="0" y="0"/>
-            <a:ext cx="12192000" cy="1005840"/>
+            <a:ext cx="12192000" cy="914400"/>
           </a:xfrm>
           <a:prstGeom prst="rect">
             <a:avLst/>
@@ -2954,8 +3549,8 @@
         </p:nvSpPr>
         <p:spPr>
           <a:xfrm>
-            <a:off x="365760" y="164592"/>
-            <a:ext cx="10607040" cy="685800"/>
+            <a:off x="347472" y="109728"/>
+            <a:ext cx="11612880" cy="694944"/>
           </a:xfrm>
           <a:prstGeom prst="rect">
             <a:avLst/>
@@ -2971,7 +3566,7 @@
               <a:buNone/>
             </a:pPr>
             <a:r>
-              <a:rPr lang="en-US" sz="2400" b="1" dirty="0">
+              <a:rPr lang="en-US" sz="2200" b="1" dirty="0">
                 <a:solidFill>
                   <a:srgbClr val="E8ECF4"/>
                 </a:solidFill>
@@ -2981,20 +3576,45 @@
               </a:rPr>
               <a:t>Project Timeline</a:t>
             </a:r>
-            <a:endParaRPr lang="en-US" sz="2400" dirty="0"/>
-          </a:p>
-        </p:txBody>
-      </p:sp>
-      <p:sp>
-        <p:nvSpPr>
-          <p:cNvPr id="4" name="Text 2"/>
-          <p:cNvSpPr/>
-          <p:nvPr/>
-        </p:nvSpPr>
-        <p:spPr>
-          <a:xfrm>
-            <a:off x="457200" y="1188720"/>
-            <a:ext cx="10424160" cy="4754880"/>
+            <a:endParaRPr lang="en-US" sz="2200" dirty="0"/>
+          </a:p>
+        </p:txBody>
+      </p:sp>
+      <p:sp>
+        <p:nvSpPr>
+          <p:cNvPr id="4" name="Shape 2"/>
+          <p:cNvSpPr/>
+          <p:nvPr/>
+        </p:nvSpPr>
+        <p:spPr>
+          <a:xfrm>
+            <a:off x="441198" y="1463040"/>
+            <a:ext cx="3474720" cy="2926080"/>
+          </a:xfrm>
+          <a:prstGeom prst="rect">
+            <a:avLst/>
+          </a:prstGeom>
+          <a:solidFill>
+            <a:srgbClr val="2D3142"/>
+          </a:solidFill>
+          <a:ln w="19050">
+            <a:solidFill>
+              <a:srgbClr val="4F6EF7"/>
+            </a:solidFill>
+            <a:prstDash val="solid"/>
+          </a:ln>
+        </p:spPr>
+      </p:sp>
+      <p:sp>
+        <p:nvSpPr>
+          <p:cNvPr id="5" name="Text 3"/>
+          <p:cNvSpPr/>
+          <p:nvPr/>
+        </p:nvSpPr>
+        <p:spPr>
+          <a:xfrm>
+            <a:off x="441198" y="1645920"/>
+            <a:ext cx="3474720" cy="1280160"/>
           </a:xfrm>
           <a:prstGeom prst="rect">
             <a:avLst/>
@@ -3003,15 +3623,53 @@
           <a:ln/>
         </p:spPr>
         <p:txBody>
-          <a:bodyPr wrap="square" rtlCol="0" anchor="t"/>
-          <a:lstStyle/>
-          <a:p>
-            <a:pPr marL="342900" indent="-342900">
-              <a:buSzPct val="100000"/>
-              <a:buChar char="•"/>
-            </a:pPr>
-            <a:r>
-              <a:rPr lang="en-US" sz="1600" dirty="0">
+          <a:bodyPr wrap="square" rtlCol="0" anchor="ctr"/>
+          <a:lstStyle/>
+          <a:p>
+            <a:pPr algn="ctr" indent="0" marL="0">
+              <a:buNone/>
+            </a:pPr>
+            <a:r>
+              <a:rPr lang="en-US" sz="4000" b="1" dirty="0">
+                <a:solidFill>
+                  <a:srgbClr val="4F6EF7"/>
+                </a:solidFill>
+                <a:latin typeface="Calibri" pitchFamily="34" charset="0"/>
+                <a:ea typeface="Calibri" pitchFamily="34" charset="-122"/>
+                <a:cs typeface="Calibri" pitchFamily="34" charset="-120"/>
+              </a:rPr>
+              <a:t>Phase 1</a:t>
+            </a:r>
+            <a:endParaRPr lang="en-US" sz="4000" dirty="0"/>
+          </a:p>
+        </p:txBody>
+      </p:sp>
+      <p:sp>
+        <p:nvSpPr>
+          <p:cNvPr id="6" name="Text 4"/>
+          <p:cNvSpPr/>
+          <p:nvPr/>
+        </p:nvSpPr>
+        <p:spPr>
+          <a:xfrm>
+            <a:off x="441198" y="2926080"/>
+            <a:ext cx="3474720" cy="502920"/>
+          </a:xfrm>
+          <a:prstGeom prst="rect">
+            <a:avLst/>
+          </a:prstGeom>
+          <a:noFill/>
+          <a:ln/>
+        </p:spPr>
+        <p:txBody>
+          <a:bodyPr wrap="square" rtlCol="0" anchor="ctr"/>
+          <a:lstStyle/>
+          <a:p>
+            <a:pPr algn="ctr" indent="0" marL="0">
+              <a:buNone/>
+            </a:pPr>
+            <a:r>
+              <a:rPr lang="en-US" sz="1500" dirty="0">
                 <a:solidFill>
                   <a:srgbClr val="E8ECF4"/>
                 </a:solidFill>
@@ -3019,17 +3677,141 @@
                 <a:ea typeface="Calibri" pitchFamily="34" charset="-122"/>
                 <a:cs typeface="Calibri" pitchFamily="34" charset="-120"/>
               </a:rPr>
-              <a:t>Phase 1: {{Description}} — {{Duration}}</a:t>
-            </a:r>
-            <a:endParaRPr lang="en-US" sz="1600" dirty="0"/>
-          </a:p>
-          <a:p>
-            <a:pPr marL="342900" indent="-342900">
-              <a:buSzPct val="100000"/>
-              <a:buChar char="•"/>
-            </a:pPr>
-            <a:r>
-              <a:rPr lang="en-US" sz="1600" dirty="0">
+              <a:t>Discovery &amp; Design</a:t>
+            </a:r>
+            <a:endParaRPr lang="en-US" sz="1500" dirty="0"/>
+          </a:p>
+        </p:txBody>
+      </p:sp>
+      <p:sp>
+        <p:nvSpPr>
+          <p:cNvPr id="7" name="Text 5"/>
+          <p:cNvSpPr/>
+          <p:nvPr/>
+        </p:nvSpPr>
+        <p:spPr>
+          <a:xfrm>
+            <a:off x="441198" y="3429000"/>
+            <a:ext cx="3474720" cy="365760"/>
+          </a:xfrm>
+          <a:prstGeom prst="rect">
+            <a:avLst/>
+          </a:prstGeom>
+          <a:noFill/>
+          <a:ln/>
+        </p:spPr>
+        <p:txBody>
+          <a:bodyPr wrap="square" rtlCol="0" anchor="ctr"/>
+          <a:lstStyle/>
+          <a:p>
+            <a:pPr algn="ctr" indent="0" marL="0">
+              <a:buNone/>
+            </a:pPr>
+            <a:r>
+              <a:rPr lang="en-US" sz="1100" dirty="0">
+                <a:solidFill>
+                  <a:srgbClr val="8892B0"/>
+                </a:solidFill>
+                <a:latin typeface="Calibri" pitchFamily="34" charset="0"/>
+                <a:ea typeface="Calibri" pitchFamily="34" charset="-122"/>
+                <a:cs typeface="Calibri" pitchFamily="34" charset="-120"/>
+              </a:rPr>
+              <a:t>2 weeks</a:t>
+            </a:r>
+            <a:endParaRPr lang="en-US" sz="1100" dirty="0"/>
+          </a:p>
+        </p:txBody>
+      </p:sp>
+      <p:sp>
+        <p:nvSpPr>
+          <p:cNvPr id="8" name="Shape 6"/>
+          <p:cNvSpPr/>
+          <p:nvPr/>
+        </p:nvSpPr>
+        <p:spPr>
+          <a:xfrm>
+            <a:off x="4357116" y="1463040"/>
+            <a:ext cx="3474720" cy="2926080"/>
+          </a:xfrm>
+          <a:prstGeom prst="rect">
+            <a:avLst/>
+          </a:prstGeom>
+          <a:solidFill>
+            <a:srgbClr val="2D3142"/>
+          </a:solidFill>
+          <a:ln w="19050">
+            <a:solidFill>
+              <a:srgbClr val="4F6EF7"/>
+            </a:solidFill>
+            <a:prstDash val="solid"/>
+          </a:ln>
+        </p:spPr>
+      </p:sp>
+      <p:sp>
+        <p:nvSpPr>
+          <p:cNvPr id="9" name="Text 7"/>
+          <p:cNvSpPr/>
+          <p:nvPr/>
+        </p:nvSpPr>
+        <p:spPr>
+          <a:xfrm>
+            <a:off x="4357116" y="1645920"/>
+            <a:ext cx="3474720" cy="1280160"/>
+          </a:xfrm>
+          <a:prstGeom prst="rect">
+            <a:avLst/>
+          </a:prstGeom>
+          <a:noFill/>
+          <a:ln/>
+        </p:spPr>
+        <p:txBody>
+          <a:bodyPr wrap="square" rtlCol="0" anchor="ctr"/>
+          <a:lstStyle/>
+          <a:p>
+            <a:pPr algn="ctr" indent="0" marL="0">
+              <a:buNone/>
+            </a:pPr>
+            <a:r>
+              <a:rPr lang="en-US" sz="4000" b="1" dirty="0">
+                <a:solidFill>
+                  <a:srgbClr val="4F6EF7"/>
+                </a:solidFill>
+                <a:latin typeface="Calibri" pitchFamily="34" charset="0"/>
+                <a:ea typeface="Calibri" pitchFamily="34" charset="-122"/>
+                <a:cs typeface="Calibri" pitchFamily="34" charset="-120"/>
+              </a:rPr>
+              <a:t>Phase 2</a:t>
+            </a:r>
+            <a:endParaRPr lang="en-US" sz="4000" dirty="0"/>
+          </a:p>
+        </p:txBody>
+      </p:sp>
+      <p:sp>
+        <p:nvSpPr>
+          <p:cNvPr id="10" name="Text 8"/>
+          <p:cNvSpPr/>
+          <p:nvPr/>
+        </p:nvSpPr>
+        <p:spPr>
+          <a:xfrm>
+            <a:off x="4357116" y="2926080"/>
+            <a:ext cx="3474720" cy="502920"/>
+          </a:xfrm>
+          <a:prstGeom prst="rect">
+            <a:avLst/>
+          </a:prstGeom>
+          <a:noFill/>
+          <a:ln/>
+        </p:spPr>
+        <p:txBody>
+          <a:bodyPr wrap="square" rtlCol="0" anchor="ctr"/>
+          <a:lstStyle/>
+          <a:p>
+            <a:pPr algn="ctr" indent="0" marL="0">
+              <a:buNone/>
+            </a:pPr>
+            <a:r>
+              <a:rPr lang="en-US" sz="1500" dirty="0">
                 <a:solidFill>
                   <a:srgbClr val="E8ECF4"/>
                 </a:solidFill>
@@ -3037,17 +3819,141 @@
                 <a:ea typeface="Calibri" pitchFamily="34" charset="-122"/>
                 <a:cs typeface="Calibri" pitchFamily="34" charset="-120"/>
               </a:rPr>
-              <a:t>Phase 2: {{Description}} — {{Duration}}</a:t>
-            </a:r>
-            <a:endParaRPr lang="en-US" sz="1600" dirty="0"/>
-          </a:p>
-          <a:p>
-            <a:pPr marL="342900" indent="-342900">
-              <a:buSzPct val="100000"/>
-              <a:buChar char="•"/>
-            </a:pPr>
-            <a:r>
-              <a:rPr lang="en-US" sz="1600" dirty="0">
+              <a:t>Development</a:t>
+            </a:r>
+            <a:endParaRPr lang="en-US" sz="1500" dirty="0"/>
+          </a:p>
+        </p:txBody>
+      </p:sp>
+      <p:sp>
+        <p:nvSpPr>
+          <p:cNvPr id="11" name="Text 9"/>
+          <p:cNvSpPr/>
+          <p:nvPr/>
+        </p:nvSpPr>
+        <p:spPr>
+          <a:xfrm>
+            <a:off x="4357116" y="3429000"/>
+            <a:ext cx="3474720" cy="365760"/>
+          </a:xfrm>
+          <a:prstGeom prst="rect">
+            <a:avLst/>
+          </a:prstGeom>
+          <a:noFill/>
+          <a:ln/>
+        </p:spPr>
+        <p:txBody>
+          <a:bodyPr wrap="square" rtlCol="0" anchor="ctr"/>
+          <a:lstStyle/>
+          <a:p>
+            <a:pPr algn="ctr" indent="0" marL="0">
+              <a:buNone/>
+            </a:pPr>
+            <a:r>
+              <a:rPr lang="en-US" sz="1100" dirty="0">
+                <a:solidFill>
+                  <a:srgbClr val="8892B0"/>
+                </a:solidFill>
+                <a:latin typeface="Calibri" pitchFamily="34" charset="0"/>
+                <a:ea typeface="Calibri" pitchFamily="34" charset="-122"/>
+                <a:cs typeface="Calibri" pitchFamily="34" charset="-120"/>
+              </a:rPr>
+              <a:t>6–8 weeks</a:t>
+            </a:r>
+            <a:endParaRPr lang="en-US" sz="1100" dirty="0"/>
+          </a:p>
+        </p:txBody>
+      </p:sp>
+      <p:sp>
+        <p:nvSpPr>
+          <p:cNvPr id="12" name="Shape 10"/>
+          <p:cNvSpPr/>
+          <p:nvPr/>
+        </p:nvSpPr>
+        <p:spPr>
+          <a:xfrm>
+            <a:off x="8273034" y="1463040"/>
+            <a:ext cx="3474720" cy="2926080"/>
+          </a:xfrm>
+          <a:prstGeom prst="rect">
+            <a:avLst/>
+          </a:prstGeom>
+          <a:solidFill>
+            <a:srgbClr val="2D3142"/>
+          </a:solidFill>
+          <a:ln w="19050">
+            <a:solidFill>
+              <a:srgbClr val="4F6EF7"/>
+            </a:solidFill>
+            <a:prstDash val="solid"/>
+          </a:ln>
+        </p:spPr>
+      </p:sp>
+      <p:sp>
+        <p:nvSpPr>
+          <p:cNvPr id="13" name="Text 11"/>
+          <p:cNvSpPr/>
+          <p:nvPr/>
+        </p:nvSpPr>
+        <p:spPr>
+          <a:xfrm>
+            <a:off x="8273034" y="1645920"/>
+            <a:ext cx="3474720" cy="1280160"/>
+          </a:xfrm>
+          <a:prstGeom prst="rect">
+            <a:avLst/>
+          </a:prstGeom>
+          <a:noFill/>
+          <a:ln/>
+        </p:spPr>
+        <p:txBody>
+          <a:bodyPr wrap="square" rtlCol="0" anchor="ctr"/>
+          <a:lstStyle/>
+          <a:p>
+            <a:pPr algn="ctr" indent="0" marL="0">
+              <a:buNone/>
+            </a:pPr>
+            <a:r>
+              <a:rPr lang="en-US" sz="4000" b="1" dirty="0">
+                <a:solidFill>
+                  <a:srgbClr val="4F6EF7"/>
+                </a:solidFill>
+                <a:latin typeface="Calibri" pitchFamily="34" charset="0"/>
+                <a:ea typeface="Calibri" pitchFamily="34" charset="-122"/>
+                <a:cs typeface="Calibri" pitchFamily="34" charset="-120"/>
+              </a:rPr>
+              <a:t>Phase 3</a:t>
+            </a:r>
+            <a:endParaRPr lang="en-US" sz="4000" dirty="0"/>
+          </a:p>
+        </p:txBody>
+      </p:sp>
+      <p:sp>
+        <p:nvSpPr>
+          <p:cNvPr id="14" name="Text 12"/>
+          <p:cNvSpPr/>
+          <p:nvPr/>
+        </p:nvSpPr>
+        <p:spPr>
+          <a:xfrm>
+            <a:off x="8273034" y="2926080"/>
+            <a:ext cx="3474720" cy="502920"/>
+          </a:xfrm>
+          <a:prstGeom prst="rect">
+            <a:avLst/>
+          </a:prstGeom>
+          <a:noFill/>
+          <a:ln/>
+        </p:spPr>
+        <p:txBody>
+          <a:bodyPr wrap="square" rtlCol="0" anchor="ctr"/>
+          <a:lstStyle/>
+          <a:p>
+            <a:pPr algn="ctr" indent="0" marL="0">
+              <a:buNone/>
+            </a:pPr>
+            <a:r>
+              <a:rPr lang="en-US" sz="1500" dirty="0">
                 <a:solidFill>
                   <a:srgbClr val="E8ECF4"/>
                 </a:solidFill>
@@ -3055,9 +3961,48 @@
                 <a:ea typeface="Calibri" pitchFamily="34" charset="-122"/>
                 <a:cs typeface="Calibri" pitchFamily="34" charset="-120"/>
               </a:rPr>
-              <a:t>Phase 3: {{Description}} — {{Duration}}</a:t>
-            </a:r>
-            <a:endParaRPr lang="en-US" sz="1600" dirty="0"/>
+              <a:t>Testing &amp; Launch</a:t>
+            </a:r>
+            <a:endParaRPr lang="en-US" sz="1500" dirty="0"/>
+          </a:p>
+        </p:txBody>
+      </p:sp>
+      <p:sp>
+        <p:nvSpPr>
+          <p:cNvPr id="15" name="Text 13"/>
+          <p:cNvSpPr/>
+          <p:nvPr/>
+        </p:nvSpPr>
+        <p:spPr>
+          <a:xfrm>
+            <a:off x="8273034" y="3429000"/>
+            <a:ext cx="3474720" cy="365760"/>
+          </a:xfrm>
+          <a:prstGeom prst="rect">
+            <a:avLst/>
+          </a:prstGeom>
+          <a:noFill/>
+          <a:ln/>
+        </p:spPr>
+        <p:txBody>
+          <a:bodyPr wrap="square" rtlCol="0" anchor="ctr"/>
+          <a:lstStyle/>
+          <a:p>
+            <a:pPr algn="ctr" indent="0" marL="0">
+              <a:buNone/>
+            </a:pPr>
+            <a:r>
+              <a:rPr lang="en-US" sz="1100" dirty="0">
+                <a:solidFill>
+                  <a:srgbClr val="8892B0"/>
+                </a:solidFill>
+                <a:latin typeface="Calibri" pitchFamily="34" charset="0"/>
+                <a:ea typeface="Calibri" pitchFamily="34" charset="-122"/>
+                <a:cs typeface="Calibri" pitchFamily="34" charset="-120"/>
+              </a:rPr>
+              <a:t>2 weeks</a:t>
+            </a:r>
+            <a:endParaRPr lang="en-US" sz="1100" dirty="0"/>
           </a:p>
         </p:txBody>
       </p:sp>
@@ -3095,7 +4040,27 @@
         <p:spPr>
           <a:xfrm>
             <a:off x="0" y="0"/>
-            <a:ext cx="12192000" cy="1005840"/>
+            <a:ext cx="109728" cy="6858000"/>
+          </a:xfrm>
+          <a:prstGeom prst="rect">
+            <a:avLst/>
+          </a:prstGeom>
+          <a:solidFill>
+            <a:srgbClr val="4F6EF7"/>
+          </a:solidFill>
+          <a:ln/>
+        </p:spPr>
+      </p:sp>
+      <p:sp>
+        <p:nvSpPr>
+          <p:cNvPr id="3" name="Shape 1"/>
+          <p:cNvSpPr/>
+          <p:nvPr/>
+        </p:nvSpPr>
+        <p:spPr>
+          <a:xfrm>
+            <a:off x="109728" y="0"/>
+            <a:ext cx="12079224" cy="914400"/>
           </a:xfrm>
           <a:prstGeom prst="rect">
             <a:avLst/>
@@ -3108,14 +4073,14 @@
       </p:sp>
       <p:sp>
         <p:nvSpPr>
-          <p:cNvPr id="3" name="Text 1"/>
-          <p:cNvSpPr/>
-          <p:nvPr/>
-        </p:nvSpPr>
-        <p:spPr>
-          <a:xfrm>
-            <a:off x="365760" y="164592"/>
-            <a:ext cx="10607040" cy="685800"/>
+          <p:cNvPr id="4" name="Text 2"/>
+          <p:cNvSpPr/>
+          <p:nvPr/>
+        </p:nvSpPr>
+        <p:spPr>
+          <a:xfrm>
+            <a:off x="347472" y="109728"/>
+            <a:ext cx="11612880" cy="694944"/>
           </a:xfrm>
           <a:prstGeom prst="rect">
             <a:avLst/>
@@ -3131,7 +4096,7 @@
               <a:buNone/>
             </a:pPr>
             <a:r>
-              <a:rPr lang="en-US" sz="2400" b="1" dirty="0">
+              <a:rPr lang="en-US" sz="2200" b="1" dirty="0">
                 <a:solidFill>
                   <a:srgbClr val="E8ECF4"/>
                 </a:solidFill>
@@ -3141,20 +4106,20 @@
               </a:rPr>
               <a:t>Team &amp; Expertise</a:t>
             </a:r>
-            <a:endParaRPr lang="en-US" sz="2400" dirty="0"/>
-          </a:p>
-        </p:txBody>
-      </p:sp>
-      <p:sp>
-        <p:nvSpPr>
-          <p:cNvPr id="4" name="Text 2"/>
-          <p:cNvSpPr/>
-          <p:nvPr/>
-        </p:nvSpPr>
-        <p:spPr>
-          <a:xfrm>
-            <a:off x="457200" y="1188720"/>
-            <a:ext cx="10424160" cy="4754880"/>
+            <a:endParaRPr lang="en-US" sz="2200" dirty="0"/>
+          </a:p>
+        </p:txBody>
+      </p:sp>
+      <p:sp>
+        <p:nvSpPr>
+          <p:cNvPr id="5" name="Text 3"/>
+          <p:cNvSpPr/>
+          <p:nvPr/>
+        </p:nvSpPr>
+        <p:spPr>
+          <a:xfrm>
+            <a:off x="457200" y="1097280"/>
+            <a:ext cx="11430000" cy="5212080"/>
           </a:xfrm>
           <a:prstGeom prst="rect">
             <a:avLst/>
@@ -3166,12 +4131,13 @@
           <a:bodyPr wrap="square" rtlCol="0" anchor="t"/>
           <a:lstStyle/>
           <a:p>
-            <a:pPr marL="342900" indent="-342900">
-              <a:buSzPct val="100000"/>
-              <a:buChar char="•"/>
-            </a:pPr>
-            <a:r>
-              <a:rPr lang="en-US" sz="1600" dirty="0">
+            <a:pPr>
+              <a:spcAft>
+                <a:spcPts val="800"/>
+              </a:spcAft>
+            </a:pPr>
+            <a:r>
+              <a:rPr lang="en-US" sz="1500" dirty="0">
                 <a:solidFill>
                   <a:srgbClr val="E8ECF4"/>
                 </a:solidFill>
@@ -3179,17 +4145,18 @@
                 <a:ea typeface="Calibri" pitchFamily="34" charset="-122"/>
                 <a:cs typeface="Calibri" pitchFamily="34" charset="-120"/>
               </a:rPr>
-              <a:t>{{Team member 1}} — {{Role}}</a:t>
-            </a:r>
-            <a:endParaRPr lang="en-US" sz="1600" dirty="0"/>
-          </a:p>
-          <a:p>
-            <a:pPr marL="342900" indent="-342900">
-              <a:buSzPct val="100000"/>
-              <a:buChar char="•"/>
-            </a:pPr>
-            <a:r>
-              <a:rPr lang="en-US" sz="1600" dirty="0">
+              <a:t>{{Team Lead}} — {{Role, 1-line background relevant to this project}}</a:t>
+            </a:r>
+            <a:endParaRPr lang="en-US" sz="1500" dirty="0"/>
+          </a:p>
+          <a:p>
+            <a:pPr>
+              <a:spcAft>
+                <a:spcPts val="800"/>
+              </a:spcAft>
+            </a:pPr>
+            <a:r>
+              <a:rPr lang="en-US" sz="1500" dirty="0">
                 <a:solidFill>
                   <a:srgbClr val="E8ECF4"/>
                 </a:solidFill>
@@ -3197,17 +4164,18 @@
                 <a:ea typeface="Calibri" pitchFamily="34" charset="-122"/>
                 <a:cs typeface="Calibri" pitchFamily="34" charset="-120"/>
               </a:rPr>
-              <a:t>{{Team member 2}} — {{Role}}</a:t>
-            </a:r>
-            <a:endParaRPr lang="en-US" sz="1600" dirty="0"/>
-          </a:p>
-          <a:p>
-            <a:pPr marL="342900" indent="-342900">
-              <a:buSzPct val="100000"/>
-              <a:buChar char="•"/>
-            </a:pPr>
-            <a:r>
-              <a:rPr lang="en-US" sz="1600" dirty="0">
+              <a:t>{{Team Member}} — {{Role, key skill}}</a:t>
+            </a:r>
+            <a:endParaRPr lang="en-US" sz="1500" dirty="0"/>
+          </a:p>
+          <a:p>
+            <a:pPr>
+              <a:spcAft>
+                <a:spcPts val="800"/>
+              </a:spcAft>
+            </a:pPr>
+            <a:r>
+              <a:rPr lang="en-US" sz="1500" dirty="0">
                 <a:solidFill>
                   <a:srgbClr val="E8ECF4"/>
                 </a:solidFill>
@@ -3215,9 +4183,9 @@
                 <a:ea typeface="Calibri" pitchFamily="34" charset="-122"/>
                 <a:cs typeface="Calibri" pitchFamily="34" charset="-120"/>
               </a:rPr>
-              <a:t>{{Relevant experience}}</a:t>
-            </a:r>
-            <a:endParaRPr lang="en-US" sz="1600" dirty="0"/>
+              <a:t>{{Relevant past project: "Delivered X for Y — outcome"}}</a:t>
+            </a:r>
+            <a:endParaRPr lang="en-US" sz="1500" dirty="0"/>
           </a:p>
         </p:txBody>
       </p:sp>
@@ -3255,7 +4223,7 @@
         <p:spPr>
           <a:xfrm>
             <a:off x="0" y="0"/>
-            <a:ext cx="12192000" cy="1005840"/>
+            <a:ext cx="12192000" cy="914400"/>
           </a:xfrm>
           <a:prstGeom prst="rect">
             <a:avLst/>
@@ -3274,8 +4242,8 @@
         </p:nvSpPr>
         <p:spPr>
           <a:xfrm>
-            <a:off x="365760" y="164592"/>
-            <a:ext cx="10607040" cy="685800"/>
+            <a:off x="347472" y="109728"/>
+            <a:ext cx="11612880" cy="694944"/>
           </a:xfrm>
           <a:prstGeom prst="rect">
             <a:avLst/>
@@ -3291,7 +4259,7 @@
               <a:buNone/>
             </a:pPr>
             <a:r>
-              <a:rPr lang="en-US" sz="2400" b="1" dirty="0">
+              <a:rPr lang="en-US" sz="2200" b="1" dirty="0">
                 <a:solidFill>
                   <a:srgbClr val="E8ECF4"/>
                 </a:solidFill>
@@ -3299,22 +4267,47 @@
                 <a:ea typeface="Calibri" pitchFamily="34" charset="-122"/>
                 <a:cs typeface="Calibri" pitchFamily="34" charset="-120"/>
               </a:rPr>
-              <a:t>Investment</a:t>
-            </a:r>
-            <a:endParaRPr lang="en-US" sz="2400" dirty="0"/>
-          </a:p>
-        </p:txBody>
-      </p:sp>
-      <p:sp>
-        <p:nvSpPr>
-          <p:cNvPr id="4" name="Text 2"/>
-          <p:cNvSpPr/>
-          <p:nvPr/>
-        </p:nvSpPr>
-        <p:spPr>
-          <a:xfrm>
-            <a:off x="457200" y="1188720"/>
-            <a:ext cx="10424160" cy="4754880"/>
+              <a:t>Investment Estimate</a:t>
+            </a:r>
+            <a:endParaRPr lang="en-US" sz="2200" dirty="0"/>
+          </a:p>
+        </p:txBody>
+      </p:sp>
+      <p:sp>
+        <p:nvSpPr>
+          <p:cNvPr id="4" name="Shape 2"/>
+          <p:cNvSpPr/>
+          <p:nvPr/>
+        </p:nvSpPr>
+        <p:spPr>
+          <a:xfrm>
+            <a:off x="441198" y="1463040"/>
+            <a:ext cx="3474720" cy="2926080"/>
+          </a:xfrm>
+          <a:prstGeom prst="rect">
+            <a:avLst/>
+          </a:prstGeom>
+          <a:solidFill>
+            <a:srgbClr val="2D3142"/>
+          </a:solidFill>
+          <a:ln w="19050">
+            <a:solidFill>
+              <a:srgbClr val="4F6EF7"/>
+            </a:solidFill>
+            <a:prstDash val="solid"/>
+          </a:ln>
+        </p:spPr>
+      </p:sp>
+      <p:sp>
+        <p:nvSpPr>
+          <p:cNvPr id="5" name="Text 3"/>
+          <p:cNvSpPr/>
+          <p:nvPr/>
+        </p:nvSpPr>
+        <p:spPr>
+          <a:xfrm>
+            <a:off x="441198" y="1645920"/>
+            <a:ext cx="3474720" cy="1280160"/>
           </a:xfrm>
           <a:prstGeom prst="rect">
             <a:avLst/>
@@ -3323,15 +4316,53 @@
           <a:ln/>
         </p:spPr>
         <p:txBody>
-          <a:bodyPr wrap="square" rtlCol="0" anchor="t"/>
-          <a:lstStyle/>
-          <a:p>
-            <a:pPr marL="342900" indent="-342900">
-              <a:buSzPct val="100000"/>
-              <a:buChar char="•"/>
-            </a:pPr>
-            <a:r>
-              <a:rPr lang="en-US" sz="1600" dirty="0">
+          <a:bodyPr wrap="square" rtlCol="0" anchor="ctr"/>
+          <a:lstStyle/>
+          <a:p>
+            <a:pPr algn="ctr" indent="0" marL="0">
+              <a:buNone/>
+            </a:pPr>
+            <a:r>
+              <a:rPr lang="en-US" sz="4000" b="1" dirty="0">
+                <a:solidFill>
+                  <a:srgbClr val="4F6EF7"/>
+                </a:solidFill>
+                <a:latin typeface="Calibri" pitchFamily="34" charset="0"/>
+                <a:ea typeface="Calibri" pitchFamily="34" charset="-122"/>
+                <a:cs typeface="Calibri" pitchFamily="34" charset="-120"/>
+              </a:rPr>
+              <a:t>${{XX}}K</a:t>
+            </a:r>
+            <a:endParaRPr lang="en-US" sz="4000" dirty="0"/>
+          </a:p>
+        </p:txBody>
+      </p:sp>
+      <p:sp>
+        <p:nvSpPr>
+          <p:cNvPr id="6" name="Text 4"/>
+          <p:cNvSpPr/>
+          <p:nvPr/>
+        </p:nvSpPr>
+        <p:spPr>
+          <a:xfrm>
+            <a:off x="441198" y="2926080"/>
+            <a:ext cx="3474720" cy="502920"/>
+          </a:xfrm>
+          <a:prstGeom prst="rect">
+            <a:avLst/>
+          </a:prstGeom>
+          <a:noFill/>
+          <a:ln/>
+        </p:spPr>
+        <p:txBody>
+          <a:bodyPr wrap="square" rtlCol="0" anchor="ctr"/>
+          <a:lstStyle/>
+          <a:p>
+            <a:pPr algn="ctr" indent="0" marL="0">
+              <a:buNone/>
+            </a:pPr>
+            <a:r>
+              <a:rPr lang="en-US" sz="1500" dirty="0">
                 <a:solidFill>
                   <a:srgbClr val="E8ECF4"/>
                 </a:solidFill>
@@ -3339,17 +4370,141 @@
                 <a:ea typeface="Calibri" pitchFamily="34" charset="-122"/>
                 <a:cs typeface="Calibri" pitchFamily="34" charset="-120"/>
               </a:rPr>
-              <a:t>Total estimate: {{Amount}}</a:t>
-            </a:r>
-            <a:endParaRPr lang="en-US" sz="1600" dirty="0"/>
-          </a:p>
-          <a:p>
-            <a:pPr marL="342900" indent="-342900">
-              <a:buSzPct val="100000"/>
-              <a:buChar char="•"/>
-            </a:pPr>
-            <a:r>
-              <a:rPr lang="en-US" sz="1600" dirty="0">
+              <a:t>Total Investment</a:t>
+            </a:r>
+            <a:endParaRPr lang="en-US" sz="1500" dirty="0"/>
+          </a:p>
+        </p:txBody>
+      </p:sp>
+      <p:sp>
+        <p:nvSpPr>
+          <p:cNvPr id="7" name="Text 5"/>
+          <p:cNvSpPr/>
+          <p:nvPr/>
+        </p:nvSpPr>
+        <p:spPr>
+          <a:xfrm>
+            <a:off x="441198" y="3429000"/>
+            <a:ext cx="3474720" cy="365760"/>
+          </a:xfrm>
+          <a:prstGeom prst="rect">
+            <a:avLst/>
+          </a:prstGeom>
+          <a:noFill/>
+          <a:ln/>
+        </p:spPr>
+        <p:txBody>
+          <a:bodyPr wrap="square" rtlCol="0" anchor="ctr"/>
+          <a:lstStyle/>
+          <a:p>
+            <a:pPr algn="ctr" indent="0" marL="0">
+              <a:buNone/>
+            </a:pPr>
+            <a:r>
+              <a:rPr lang="en-US" sz="1100" dirty="0">
+                <a:solidFill>
+                  <a:srgbClr val="8892B0"/>
+                </a:solidFill>
+                <a:latin typeface="Calibri" pitchFamily="34" charset="0"/>
+                <a:ea typeface="Calibri" pitchFamily="34" charset="-122"/>
+                <a:cs typeface="Calibri" pitchFamily="34" charset="-120"/>
+              </a:rPr>
+              <a:t>{{Payment terms}}</a:t>
+            </a:r>
+            <a:endParaRPr lang="en-US" sz="1100" dirty="0"/>
+          </a:p>
+        </p:txBody>
+      </p:sp>
+      <p:sp>
+        <p:nvSpPr>
+          <p:cNvPr id="8" name="Shape 6"/>
+          <p:cNvSpPr/>
+          <p:nvPr/>
+        </p:nvSpPr>
+        <p:spPr>
+          <a:xfrm>
+            <a:off x="4357116" y="1463040"/>
+            <a:ext cx="3474720" cy="2926080"/>
+          </a:xfrm>
+          <a:prstGeom prst="rect">
+            <a:avLst/>
+          </a:prstGeom>
+          <a:solidFill>
+            <a:srgbClr val="2D3142"/>
+          </a:solidFill>
+          <a:ln w="19050">
+            <a:solidFill>
+              <a:srgbClr val="4F6EF7"/>
+            </a:solidFill>
+            <a:prstDash val="solid"/>
+          </a:ln>
+        </p:spPr>
+      </p:sp>
+      <p:sp>
+        <p:nvSpPr>
+          <p:cNvPr id="9" name="Text 7"/>
+          <p:cNvSpPr/>
+          <p:nvPr/>
+        </p:nvSpPr>
+        <p:spPr>
+          <a:xfrm>
+            <a:off x="4357116" y="1645920"/>
+            <a:ext cx="3474720" cy="1280160"/>
+          </a:xfrm>
+          <a:prstGeom prst="rect">
+            <a:avLst/>
+          </a:prstGeom>
+          <a:noFill/>
+          <a:ln/>
+        </p:spPr>
+        <p:txBody>
+          <a:bodyPr wrap="square" rtlCol="0" anchor="ctr"/>
+          <a:lstStyle/>
+          <a:p>
+            <a:pPr algn="ctr" indent="0" marL="0">
+              <a:buNone/>
+            </a:pPr>
+            <a:r>
+              <a:rPr lang="en-US" sz="4000" b="1" dirty="0">
+                <a:solidFill>
+                  <a:srgbClr val="4F6EF7"/>
+                </a:solidFill>
+                <a:latin typeface="Calibri" pitchFamily="34" charset="0"/>
+                <a:ea typeface="Calibri" pitchFamily="34" charset="-122"/>
+                <a:cs typeface="Calibri" pitchFamily="34" charset="-120"/>
+              </a:rPr>
+              <a:t>{{N}} wks</a:t>
+            </a:r>
+            <a:endParaRPr lang="en-US" sz="4000" dirty="0"/>
+          </a:p>
+        </p:txBody>
+      </p:sp>
+      <p:sp>
+        <p:nvSpPr>
+          <p:cNvPr id="10" name="Text 8"/>
+          <p:cNvSpPr/>
+          <p:nvPr/>
+        </p:nvSpPr>
+        <p:spPr>
+          <a:xfrm>
+            <a:off x="4357116" y="2926080"/>
+            <a:ext cx="3474720" cy="502920"/>
+          </a:xfrm>
+          <a:prstGeom prst="rect">
+            <a:avLst/>
+          </a:prstGeom>
+          <a:noFill/>
+          <a:ln/>
+        </p:spPr>
+        <p:txBody>
+          <a:bodyPr wrap="square" rtlCol="0" anchor="ctr"/>
+          <a:lstStyle/>
+          <a:p>
+            <a:pPr algn="ctr" indent="0" marL="0">
+              <a:buNone/>
+            </a:pPr>
+            <a:r>
+              <a:rPr lang="en-US" sz="1500" dirty="0">
                 <a:solidFill>
                   <a:srgbClr val="E8ECF4"/>
                 </a:solidFill>
@@ -3357,17 +4512,141 @@
                 <a:ea typeface="Calibri" pitchFamily="34" charset="-122"/>
                 <a:cs typeface="Calibri" pitchFamily="34" charset="-120"/>
               </a:rPr>
-              <a:t>Payment schedule: {{Terms}}</a:t>
-            </a:r>
-            <a:endParaRPr lang="en-US" sz="1600" dirty="0"/>
-          </a:p>
-          <a:p>
-            <a:pPr marL="342900" indent="-342900">
-              <a:buSzPct val="100000"/>
-              <a:buChar char="•"/>
-            </a:pPr>
-            <a:r>
-              <a:rPr lang="en-US" sz="1600" dirty="0">
+              <a:t>Time to Delivery</a:t>
+            </a:r>
+            <a:endParaRPr lang="en-US" sz="1500" dirty="0"/>
+          </a:p>
+        </p:txBody>
+      </p:sp>
+      <p:sp>
+        <p:nvSpPr>
+          <p:cNvPr id="11" name="Text 9"/>
+          <p:cNvSpPr/>
+          <p:nvPr/>
+        </p:nvSpPr>
+        <p:spPr>
+          <a:xfrm>
+            <a:off x="4357116" y="3429000"/>
+            <a:ext cx="3474720" cy="365760"/>
+          </a:xfrm>
+          <a:prstGeom prst="rect">
+            <a:avLst/>
+          </a:prstGeom>
+          <a:noFill/>
+          <a:ln/>
+        </p:spPr>
+        <p:txBody>
+          <a:bodyPr wrap="square" rtlCol="0" anchor="ctr"/>
+          <a:lstStyle/>
+          <a:p>
+            <a:pPr algn="ctr" indent="0" marL="0">
+              <a:buNone/>
+            </a:pPr>
+            <a:r>
+              <a:rPr lang="en-US" sz="1100" dirty="0">
+                <a:solidFill>
+                  <a:srgbClr val="8892B0"/>
+                </a:solidFill>
+                <a:latin typeface="Calibri" pitchFamily="34" charset="0"/>
+                <a:ea typeface="Calibri" pitchFamily="34" charset="-122"/>
+                <a:cs typeface="Calibri" pitchFamily="34" charset="-120"/>
+              </a:rPr>
+              <a:t>From kickoff</a:t>
+            </a:r>
+            <a:endParaRPr lang="en-US" sz="1100" dirty="0"/>
+          </a:p>
+        </p:txBody>
+      </p:sp>
+      <p:sp>
+        <p:nvSpPr>
+          <p:cNvPr id="12" name="Shape 10"/>
+          <p:cNvSpPr/>
+          <p:nvPr/>
+        </p:nvSpPr>
+        <p:spPr>
+          <a:xfrm>
+            <a:off x="8273034" y="1463040"/>
+            <a:ext cx="3474720" cy="2926080"/>
+          </a:xfrm>
+          <a:prstGeom prst="rect">
+            <a:avLst/>
+          </a:prstGeom>
+          <a:solidFill>
+            <a:srgbClr val="2D3142"/>
+          </a:solidFill>
+          <a:ln w="19050">
+            <a:solidFill>
+              <a:srgbClr val="4F6EF7"/>
+            </a:solidFill>
+            <a:prstDash val="solid"/>
+          </a:ln>
+        </p:spPr>
+      </p:sp>
+      <p:sp>
+        <p:nvSpPr>
+          <p:cNvPr id="13" name="Text 11"/>
+          <p:cNvSpPr/>
+          <p:nvPr/>
+        </p:nvSpPr>
+        <p:spPr>
+          <a:xfrm>
+            <a:off x="8273034" y="1645920"/>
+            <a:ext cx="3474720" cy="1280160"/>
+          </a:xfrm>
+          <a:prstGeom prst="rect">
+            <a:avLst/>
+          </a:prstGeom>
+          <a:noFill/>
+          <a:ln/>
+        </p:spPr>
+        <p:txBody>
+          <a:bodyPr wrap="square" rtlCol="0" anchor="ctr"/>
+          <a:lstStyle/>
+          <a:p>
+            <a:pPr algn="ctr" indent="0" marL="0">
+              <a:buNone/>
+            </a:pPr>
+            <a:r>
+              <a:rPr lang="en-US" sz="4000" b="1" dirty="0">
+                <a:solidFill>
+                  <a:srgbClr val="4F6EF7"/>
+                </a:solidFill>
+                <a:latin typeface="Calibri" pitchFamily="34" charset="0"/>
+                <a:ea typeface="Calibri" pitchFamily="34" charset="-122"/>
+                <a:cs typeface="Calibri" pitchFamily="34" charset="-120"/>
+              </a:rPr>
+              <a:t>{{ROI}}</a:t>
+            </a:r>
+            <a:endParaRPr lang="en-US" sz="4000" dirty="0"/>
+          </a:p>
+        </p:txBody>
+      </p:sp>
+      <p:sp>
+        <p:nvSpPr>
+          <p:cNvPr id="14" name="Text 12"/>
+          <p:cNvSpPr/>
+          <p:nvPr/>
+        </p:nvSpPr>
+        <p:spPr>
+          <a:xfrm>
+            <a:off x="8273034" y="2926080"/>
+            <a:ext cx="3474720" cy="502920"/>
+          </a:xfrm>
+          <a:prstGeom prst="rect">
+            <a:avLst/>
+          </a:prstGeom>
+          <a:noFill/>
+          <a:ln/>
+        </p:spPr>
+        <p:txBody>
+          <a:bodyPr wrap="square" rtlCol="0" anchor="ctr"/>
+          <a:lstStyle/>
+          <a:p>
+            <a:pPr algn="ctr" indent="0" marL="0">
+              <a:buNone/>
+            </a:pPr>
+            <a:r>
+              <a:rPr lang="en-US" sz="1500" dirty="0">
                 <a:solidFill>
                   <a:srgbClr val="E8ECF4"/>
                 </a:solidFill>
@@ -3375,9 +4654,48 @@
                 <a:ea typeface="Calibri" pitchFamily="34" charset="-122"/>
                 <a:cs typeface="Calibri" pitchFamily="34" charset="-120"/>
               </a:rPr>
-              <a:t>What's included: {{Scope}}</a:t>
-            </a:r>
-            <a:endParaRPr lang="en-US" sz="1600" dirty="0"/>
+              <a:t>Expected Return</a:t>
+            </a:r>
+            <a:endParaRPr lang="en-US" sz="1500" dirty="0"/>
+          </a:p>
+        </p:txBody>
+      </p:sp>
+      <p:sp>
+        <p:nvSpPr>
+          <p:cNvPr id="15" name="Text 13"/>
+          <p:cNvSpPr/>
+          <p:nvPr/>
+        </p:nvSpPr>
+        <p:spPr>
+          <a:xfrm>
+            <a:off x="8273034" y="3429000"/>
+            <a:ext cx="3474720" cy="365760"/>
+          </a:xfrm>
+          <a:prstGeom prst="rect">
+            <a:avLst/>
+          </a:prstGeom>
+          <a:noFill/>
+          <a:ln/>
+        </p:spPr>
+        <p:txBody>
+          <a:bodyPr wrap="square" rtlCol="0" anchor="ctr"/>
+          <a:lstStyle/>
+          <a:p>
+            <a:pPr algn="ctr" indent="0" marL="0">
+              <a:buNone/>
+            </a:pPr>
+            <a:r>
+              <a:rPr lang="en-US" sz="1100" dirty="0">
+                <a:solidFill>
+                  <a:srgbClr val="8892B0"/>
+                </a:solidFill>
+                <a:latin typeface="Calibri" pitchFamily="34" charset="0"/>
+                <a:ea typeface="Calibri" pitchFamily="34" charset="-122"/>
+                <a:cs typeface="Calibri" pitchFamily="34" charset="-120"/>
+              </a:rPr>
+              <a:t>{{Timeframe}}</a:t>
+            </a:r>
+            <a:endParaRPr lang="en-US" sz="1100" dirty="0"/>
           </a:p>
         </p:txBody>
       </p:sp>
